--- a/Defect_Sense_Executive_Presentation.pptx
+++ b/Defect_Sense_Executive_Presentation.pptx
@@ -5,11 +5,11 @@
     <p:sldMasterId id="2147483648" r:id="rId1"/>
   </p:sldMasterIdLst>
   <p:notesMasterIdLst>
-    <p:notesMasterId r:id="rId16"/>
+    <p:notesMasterId r:id="rId15"/>
   </p:notesMasterIdLst>
   <p:sldIdLst>
     <p:sldId id="256" r:id="rId2"/>
-    <p:sldId id="270" r:id="rId3"/>
+    <p:sldId id="257" r:id="rId3"/>
     <p:sldId id="258" r:id="rId4"/>
     <p:sldId id="259" r:id="rId5"/>
     <p:sldId id="260" r:id="rId6"/>
@@ -19,9 +19,8 @@
     <p:sldId id="264" r:id="rId10"/>
     <p:sldId id="265" r:id="rId11"/>
     <p:sldId id="266" r:id="rId12"/>
-    <p:sldId id="267" r:id="rId13"/>
-    <p:sldId id="268" r:id="rId14"/>
-    <p:sldId id="269" r:id="rId15"/>
+    <p:sldId id="268" r:id="rId13"/>
+    <p:sldId id="269" r:id="rId14"/>
   </p:sldIdLst>
   <p:sldSz cx="12192000" cy="6858000"/>
   <p:notesSz cx="6858000" cy="9144000"/>
@@ -779,104 +778,119 @@
           <a:lstStyle/>
           <a:p>
             <a:r>
-              <a:t>The case study, and the caveat first: this is a sixteen-week pilot simulation on</a:t>
-            </a:r>
-          </a:p>
-          <a:p>
-            <a:r>
-              <a:t>a synthetic, labelled dataset. Ground truth was recorded per record at</a:t>
-            </a:r>
-          </a:p>
-          <a:p>
-            <a:r>
-              <a:t>generation time, so we score against what was actually injected rather than a</a:t>
-            </a:r>
-          </a:p>
-          <a:p>
-            <a:r>
-              <a:t>later human opinion. We are not presenting this as real plant data, and every</a:t>
-            </a:r>
-          </a:p>
-          <a:p>
-            <a:r>
-              <a:t>figure on this slide carries that flag.</a:t>
-            </a:r>
-          </a:p>
-          <a:p>
-            <a:endParaRPr/>
-          </a:p>
-          <a:p>
-            <a:r>
-              <a:t>Eight weeks of manual-inspection baseline, then eight weeks with Defect Sense</a:t>
-            </a:r>
-          </a:p>
-          <a:p>
-            <a:r>
-              <a:t>live. Four movements.</a:t>
-            </a:r>
-          </a:p>
-          <a:p>
-            <a:endParaRPr/>
-          </a:p>
-          <a:p>
-            <a:r>
-              <a:t>Escaped defects per thousand units: four point two to one point four. Mean time</a:t>
-            </a:r>
-          </a:p>
-          <a:p>
-            <a:r>
-              <a:t>to root cause: six and a half hours to one point four. Inspection time per unit:</a:t>
-            </a:r>
-          </a:p>
-          <a:p>
-            <a:r>
-              <a:t>forty-eight seconds to twenty. First-pass yield: ninety-one point four to</a:t>
-            </a:r>
-          </a:p>
-          <a:p>
-            <a:r>
-              <a:t>ninety-seven point one percent.</a:t>
-            </a:r>
-          </a:p>
-          <a:p>
-            <a:endParaRPr/>
-          </a:p>
-          <a:p>
-            <a:r>
-              <a:t>On ROI, note what dominates. It is not the labour saving — twenty-eight seconds</a:t>
-            </a:r>
-          </a:p>
-          <a:p>
-            <a:r>
-              <a:t>per unit is real but modest, and we would redeploy that time to exception</a:t>
-            </a:r>
-          </a:p>
-          <a:p>
-            <a:r>
-              <a:t>handling rather than cut headcount. The dominant term is avoided rework and</a:t>
-            </a:r>
-          </a:p>
-          <a:p>
-            <a:r>
-              <a:t>warranty exposure, because the fusion-only defect class is precisely the class</a:t>
-            </a:r>
-          </a:p>
-          <a:p>
-            <a:r>
-              <a:t>that currently reaches the field. Payback under one quarter at pilot volumes.</a:t>
-            </a:r>
-          </a:p>
-          <a:p>
-            <a:endParaRPr/>
-          </a:p>
-          <a:p>
-            <a:r>
-              <a:t>The honest next step is a real pilot on one station for one quarter, measuring</a:t>
-            </a:r>
-          </a:p>
-          <a:p>
-            <a:r>
-              <a:t>the same four metrics against a live baseline.</a:t>
+              <a:t>Four risks. For each one I want you to hear a control that already exists rather</a:t>
+            </a:r>
+          </a:p>
+          <a:p>
+            <a:r>
+              <a:t>than a mitigation we intend to build.</a:t>
+            </a:r>
+          </a:p>
+          <a:p>
+            <a:endParaRPr/>
+          </a:p>
+          <a:p>
+            <a:r>
+              <a:t>Data quality is the highest risk in any system like this. Our control is a</a:t>
+            </a:r>
+          </a:p>
+          <a:p>
+            <a:r>
+              <a:t>data-quality gate that currently rejects about three percent of incoming</a:t>
+            </a:r>
+          </a:p>
+          <a:p>
+            <a:r>
+              <a:t>records, and we show the rejection log in the product. We inject dirty data on</a:t>
+            </a:r>
+          </a:p>
+          <a:p>
+            <a:r>
+              <a:t>purpose in test — NaNs, stuck-at sensors, clock skew, out-of-range spikes,</a:t>
+            </a:r>
+          </a:p>
+          <a:p>
+            <a:r>
+              <a:t>blown exposure.</a:t>
+            </a:r>
+          </a:p>
+          <a:p>
+            <a:endParaRPr/>
+          </a:p>
+          <a:p>
+            <a:r>
+              <a:t>User adoption is the risk that kills these programmes in practice. An inspector</a:t>
+            </a:r>
+          </a:p>
+          <a:p>
+            <a:r>
+              <a:t>that generates false alarms gets muted within two weeks. Our control is the</a:t>
+            </a:r>
+          </a:p>
+          <a:p>
+            <a:r>
+              <a:t>false-positive discipline — two percent or below — plus making operator feedback</a:t>
+            </a:r>
+          </a:p>
+          <a:p>
+            <a:r>
+              <a:t>visibly change system behaviour, so correcting it is worth their time.</a:t>
+            </a:r>
+          </a:p>
+          <a:p>
+            <a:endParaRPr/>
+          </a:p>
+          <a:p>
+            <a:r>
+              <a:t>Integration complexity: every external system sits behind an interface with both</a:t>
+            </a:r>
+          </a:p>
+          <a:p>
+            <a:r>
+              <a:t>a real and a fake implementation. That is why our test suite runs in about one</a:t>
+            </a:r>
+          </a:p>
+          <a:p>
+            <a:r>
+              <a:t>and a half seconds and why a provider outage degrades the product instead of</a:t>
+            </a:r>
+          </a:p>
+          <a:p>
+            <a:r>
+              <a:t>breaking it. Circuit breakers with half-open probing, retries with jitter,</a:t>
+            </a:r>
+          </a:p>
+          <a:p>
+            <a:r>
+              <a:t>idempotency keys, bulkheads.</a:t>
+            </a:r>
+          </a:p>
+          <a:p>
+            <a:endParaRPr/>
+          </a:p>
+          <a:p>
+            <a:r>
+              <a:t>Governance: provenance on every AI-derived value, a full audit log, tokenised</a:t>
+            </a:r>
+          </a:p>
+          <a:p>
+            <a:r>
+              <a:t>operator IDs, and an autonomy ceiling declared in configuration and enforced in</a:t>
+            </a:r>
+          </a:p>
+          <a:p>
+            <a:r>
+              <a:t>code. One more separation worth noting: a platform administrator deliberately</a:t>
+            </a:r>
+          </a:p>
+          <a:p>
+            <a:r>
+              <a:t>cannot override a quality verdict. Platform authority and quality authority are</a:t>
+            </a:r>
+          </a:p>
+          <a:p>
+            <a:r>
+              <a:t>separate.</a:t>
             </a:r>
           </a:p>
         </p:txBody>
@@ -902,188 +916,6 @@
 </file>
 
 <file path=ppt/notesSlides/notesSlide13.xml><?xml version="1.0" encoding="utf-8"?>
-<p:notes xmlns:a="http://schemas.openxmlformats.org/drawingml/2006/main" xmlns:r="http://schemas.openxmlformats.org/officeDocument/2006/relationships" xmlns:p="http://schemas.openxmlformats.org/presentationml/2006/main">
-  <p:cSld>
-    <p:spTree>
-      <p:nvGrpSpPr>
-        <p:cNvPr id="1" name=""/>
-        <p:cNvGrpSpPr/>
-        <p:nvPr/>
-      </p:nvGrpSpPr>
-      <p:grpSpPr>
-        <a:xfrm>
-          <a:off x="0" y="0"/>
-          <a:ext cx="0" cy="0"/>
-          <a:chOff x="0" y="0"/>
-          <a:chExt cx="0" cy="0"/>
-        </a:xfrm>
-      </p:grpSpPr>
-      <p:sp>
-        <p:nvSpPr>
-          <p:cNvPr id="2" name="Slide Image Placeholder 1"/>
-          <p:cNvSpPr>
-            <a:spLocks noGrp="1" noRot="1" noChangeAspect="1"/>
-          </p:cNvSpPr>
-          <p:nvPr>
-            <p:ph type="sldImg" idx="2"/>
-          </p:nvPr>
-        </p:nvSpPr>
-        <p:spPr/>
-      </p:sp>
-      <p:sp>
-        <p:nvSpPr>
-          <p:cNvPr id="3" name="Notes Placeholder 2"/>
-          <p:cNvSpPr>
-            <a:spLocks noGrp="1"/>
-          </p:cNvSpPr>
-          <p:nvPr>
-            <p:ph type="body" sz="quarter" idx="3"/>
-          </p:nvPr>
-        </p:nvSpPr>
-        <p:spPr/>
-        <p:txBody>
-          <a:bodyPr/>
-          <a:lstStyle/>
-          <a:p>
-            <a:r>
-              <a:t>Four risks. For each one I want you to hear a control that already exists rather</a:t>
-            </a:r>
-          </a:p>
-          <a:p>
-            <a:r>
-              <a:t>than a mitigation we intend to build.</a:t>
-            </a:r>
-          </a:p>
-          <a:p>
-            <a:endParaRPr/>
-          </a:p>
-          <a:p>
-            <a:r>
-              <a:t>Data quality is the highest risk in any system like this. Our control is a</a:t>
-            </a:r>
-          </a:p>
-          <a:p>
-            <a:r>
-              <a:t>data-quality gate that currently rejects about three percent of incoming</a:t>
-            </a:r>
-          </a:p>
-          <a:p>
-            <a:r>
-              <a:t>records, and we show the rejection log in the product. We inject dirty data on</a:t>
-            </a:r>
-          </a:p>
-          <a:p>
-            <a:r>
-              <a:t>purpose in test — NaNs, stuck-at sensors, clock skew, out-of-range spikes,</a:t>
-            </a:r>
-          </a:p>
-          <a:p>
-            <a:r>
-              <a:t>blown exposure.</a:t>
-            </a:r>
-          </a:p>
-          <a:p>
-            <a:endParaRPr/>
-          </a:p>
-          <a:p>
-            <a:r>
-              <a:t>User adoption is the risk that kills these programmes in practice. An inspector</a:t>
-            </a:r>
-          </a:p>
-          <a:p>
-            <a:r>
-              <a:t>that generates false alarms gets muted within two weeks. Our control is the</a:t>
-            </a:r>
-          </a:p>
-          <a:p>
-            <a:r>
-              <a:t>false-positive discipline — two percent or below — plus making operator feedback</a:t>
-            </a:r>
-          </a:p>
-          <a:p>
-            <a:r>
-              <a:t>visibly change system behaviour, so correcting it is worth their time.</a:t>
-            </a:r>
-          </a:p>
-          <a:p>
-            <a:endParaRPr/>
-          </a:p>
-          <a:p>
-            <a:r>
-              <a:t>Integration complexity: every external system sits behind an interface with both</a:t>
-            </a:r>
-          </a:p>
-          <a:p>
-            <a:r>
-              <a:t>a real and a fake implementation. That is why our test suite runs in about one</a:t>
-            </a:r>
-          </a:p>
-          <a:p>
-            <a:r>
-              <a:t>and a half seconds and why a provider outage degrades the product instead of</a:t>
-            </a:r>
-          </a:p>
-          <a:p>
-            <a:r>
-              <a:t>breaking it. Circuit breakers with half-open probing, retries with jitter,</a:t>
-            </a:r>
-          </a:p>
-          <a:p>
-            <a:r>
-              <a:t>idempotency keys, bulkheads.</a:t>
-            </a:r>
-          </a:p>
-          <a:p>
-            <a:endParaRPr/>
-          </a:p>
-          <a:p>
-            <a:r>
-              <a:t>Governance: provenance on every AI-derived value, a full audit log, tokenised</a:t>
-            </a:r>
-          </a:p>
-          <a:p>
-            <a:r>
-              <a:t>operator IDs, and an autonomy ceiling declared in configuration and enforced in</a:t>
-            </a:r>
-          </a:p>
-          <a:p>
-            <a:r>
-              <a:t>code. One more separation worth noting: a platform administrator deliberately</a:t>
-            </a:r>
-          </a:p>
-          <a:p>
-            <a:r>
-              <a:t>cannot override a quality verdict. Platform authority and quality authority are</a:t>
-            </a:r>
-          </a:p>
-          <a:p>
-            <a:r>
-              <a:t>separate.</a:t>
-            </a:r>
-          </a:p>
-        </p:txBody>
-      </p:sp>
-      <p:sp>
-        <p:nvSpPr>
-          <p:cNvPr id="4" name="Slide Number Placeholder 3"/>
-          <p:cNvSpPr>
-            <a:spLocks noGrp="1"/>
-          </p:cNvSpPr>
-          <p:nvPr>
-            <p:ph type="sldNum" sz="quarter" idx="5"/>
-          </p:nvPr>
-        </p:nvSpPr>
-        <p:spPr/>
-      </p:sp>
-    </p:spTree>
-  </p:cSld>
-  <p:clrMapOvr>
-    <a:masterClrMapping/>
-  </p:clrMapOvr>
-</p:notes>
-</file>
-
-<file path=ppt/notesSlides/notesSlide14.xml><?xml version="1.0" encoding="utf-8"?>
 <p:notes xmlns:a="http://schemas.openxmlformats.org/drawingml/2006/main" xmlns:r="http://schemas.openxmlformats.org/officeDocument/2006/relationships" xmlns:p="http://schemas.openxmlformats.org/presentationml/2006/main">
   <p:cSld>
     <p:spTree>
@@ -11721,7 +11553,7 @@
                 </a:solidFill>
                 <a:latin typeface="Calibri"/>
               </a:rPr>
-              <a:t>CASE STUDY</a:t>
+              <a:t>GOVERNANCE</a:t>
             </a:r>
           </a:p>
         </p:txBody>
@@ -11766,7 +11598,7 @@
                 </a:solidFill>
                 <a:latin typeface="Calibri"/>
               </a:rPr>
-              <a:t>PILOT SIMULATION — WHEEL ASSEMBLY STATION</a:t>
+              <a:t>RISKS AND HOW WE MITIGATE THEM</a:t>
             </a:r>
           </a:p>
         </p:txBody>
@@ -11854,7 +11686,7 @@
                 </a:solidFill>
                 <a:latin typeface="Calibri"/>
               </a:rPr>
-              <a:t>16 production weeks · 8-week manual baseline vs 8 weeks live · synthetic dataset, ground truth recorded at generation</a:t>
+              <a:t>Each risk has a named control that is already implemented, not a promise</a:t>
             </a:r>
           </a:p>
         </p:txBody>
@@ -11867,8 +11699,8 @@
         </p:nvSpPr>
         <p:spPr>
           <a:xfrm>
-            <a:off x="596188" y="2434132"/>
-            <a:ext cx="6089904" cy="2999232"/>
+            <a:off x="596188" y="2269540"/>
+            <a:ext cx="5431536" cy="1883664"/>
           </a:xfrm>
           <a:prstGeom prst="roundRect">
             <a:avLst>
@@ -11913,8 +11745,8 @@
         </p:nvSpPr>
         <p:spPr>
           <a:xfrm>
-            <a:off x="566928" y="2395728"/>
-            <a:ext cx="6089904" cy="2999232"/>
+            <a:off x="566928" y="2231136"/>
+            <a:ext cx="5431536" cy="1883664"/>
           </a:xfrm>
           <a:prstGeom prst="roundRect">
             <a:avLst>
@@ -11922,7 +11754,7 @@
             </a:avLst>
           </a:prstGeom>
           <a:solidFill>
-            <a:srgbClr val="F7F4F2"/>
+            <a:srgbClr val="FFFFFF"/>
           </a:solidFill>
           <a:ln w="12700">
             <a:solidFill>
@@ -11961,8 +11793,8 @@
         </p:nvSpPr>
         <p:spPr>
           <a:xfrm>
-            <a:off x="822960" y="2560320"/>
-            <a:ext cx="4023360" cy="219456"/>
+            <a:off x="822960" y="2432304"/>
+            <a:ext cx="3566160" cy="237744"/>
           </a:xfrm>
           <a:prstGeom prst="rect">
             <a:avLst/>
@@ -11984,13 +11816,13 @@
               </a:spcAft>
             </a:pPr>
             <a:r>
-              <a:rPr sz="1100" b="1" i="0">
-                <a:solidFill>
-                  <a:srgbClr val="E1552B"/>
-                </a:solidFill>
-                <a:latin typeface="Calibri"/>
-              </a:rPr>
-              <a:t>BEFORE VS AFTER IMPLEMENTATION</a:t>
+              <a:rPr sz="1250" b="1" i="0">
+                <a:solidFill>
+                  <a:srgbClr val="15120F"/>
+                </a:solidFill>
+                <a:latin typeface="Calibri"/>
+              </a:rPr>
+              <a:t>DATA QUALITY</a:t>
             </a:r>
           </a:p>
         </p:txBody>
@@ -12003,172 +11835,12 @@
         </p:nvSpPr>
         <p:spPr>
           <a:xfrm>
-            <a:off x="5193792" y="2542032"/>
-            <a:ext cx="1207008" cy="237744"/>
+            <a:off x="4809744" y="2432304"/>
+            <a:ext cx="932688" cy="237744"/>
           </a:xfrm>
           <a:prstGeom prst="roundRect">
             <a:avLst>
               <a:gd name="adj" fmla="val 50000"/>
-            </a:avLst>
-          </a:prstGeom>
-          <a:solidFill>
-            <a:srgbClr val="FFFFFF"/>
-          </a:solidFill>
-          <a:ln w="12700">
-            <a:solidFill>
-              <a:srgbClr val="8B837C"/>
-            </a:solidFill>
-          </a:ln>
-          <a:effectLst/>
-        </p:spPr>
-        <p:style>
-          <a:lnRef idx="1">
-            <a:schemeClr val="accent1"/>
-          </a:lnRef>
-          <a:fillRef idx="3">
-            <a:schemeClr val="accent1"/>
-          </a:fillRef>
-          <a:effectRef idx="2">
-            <a:schemeClr val="accent1"/>
-          </a:effectRef>
-          <a:fontRef idx="minor">
-            <a:schemeClr val="lt1"/>
-          </a:fontRef>
-        </p:style>
-        <p:txBody>
-          <a:bodyPr rtlCol="0" anchor="ctr"/>
-          <a:lstStyle/>
-          <a:p>
-            <a:endParaRPr/>
-          </a:p>
-        </p:txBody>
-      </p:sp>
-      <p:sp>
-        <p:nvSpPr>
-          <p:cNvPr id="13" name="TextBox 12"/>
-          <p:cNvSpPr txBox="1"/>
-          <p:nvPr/>
-        </p:nvSpPr>
-        <p:spPr>
-          <a:xfrm>
-            <a:off x="5193792" y="2542032"/>
-            <a:ext cx="1207008" cy="237744"/>
-          </a:xfrm>
-          <a:prstGeom prst="rect">
-            <a:avLst/>
-          </a:prstGeom>
-          <a:noFill/>
-        </p:spPr>
-        <p:txBody>
-          <a:bodyPr wrap="square" lIns="0" tIns="0" rIns="0" bIns="0" anchor="ctr">
-            <a:spAutoFit/>
-          </a:bodyPr>
-          <a:lstStyle/>
-          <a:p>
-            <a:pPr algn="ctr">
-              <a:spcBef>
-                <a:spcPts val="0"/>
-              </a:spcBef>
-              <a:spcAft>
-                <a:spcPts val="0"/>
-              </a:spcAft>
-            </a:pPr>
-            <a:r>
-              <a:rPr sz="850" b="1" i="0">
-                <a:solidFill>
-                  <a:srgbClr val="8B837C"/>
-                </a:solidFill>
-                <a:latin typeface="Calibri"/>
-              </a:rPr>
-              <a:t>SYNTHETIC DATA</a:t>
-            </a:r>
-          </a:p>
-        </p:txBody>
-      </p:sp>
-      <p:pic>
-        <p:nvPicPr>
-          <p:cNvPr id="14" name="Picture 13" descr="before_after.png"/>
-          <p:cNvPicPr>
-            <a:picLocks noChangeAspect="1"/>
-          </p:cNvPicPr>
-          <p:nvPr/>
-        </p:nvPicPr>
-        <p:blipFill>
-          <a:blip r:embed="rId3"/>
-          <a:stretch>
-            <a:fillRect/>
-          </a:stretch>
-        </p:blipFill>
-        <p:spPr>
-          <a:xfrm>
-            <a:off x="770076" y="2852928"/>
-            <a:ext cx="5683607" cy="2432304"/>
-          </a:xfrm>
-          <a:prstGeom prst="rect">
-            <a:avLst/>
-          </a:prstGeom>
-        </p:spPr>
-      </p:pic>
-      <p:sp>
-        <p:nvSpPr>
-          <p:cNvPr id="15" name="Rounded Rectangle 14"/>
-          <p:cNvSpPr/>
-          <p:nvPr/>
-        </p:nvSpPr>
-        <p:spPr>
-          <a:xfrm>
-            <a:off x="6960412" y="2434132"/>
-            <a:ext cx="4690872" cy="2999232"/>
-          </a:xfrm>
-          <a:prstGeom prst="roundRect">
-            <a:avLst>
-              <a:gd name="adj" fmla="val 8500"/>
-            </a:avLst>
-          </a:prstGeom>
-          <a:solidFill>
-            <a:srgbClr val="E3DEDA"/>
-          </a:solidFill>
-          <a:ln>
-            <a:noFill/>
-          </a:ln>
-          <a:effectLst/>
-        </p:spPr>
-        <p:style>
-          <a:lnRef idx="1">
-            <a:schemeClr val="accent1"/>
-          </a:lnRef>
-          <a:fillRef idx="3">
-            <a:schemeClr val="accent1"/>
-          </a:fillRef>
-          <a:effectRef idx="2">
-            <a:schemeClr val="accent1"/>
-          </a:effectRef>
-          <a:fontRef idx="minor">
-            <a:schemeClr val="lt1"/>
-          </a:fontRef>
-        </p:style>
-        <p:txBody>
-          <a:bodyPr rtlCol="0" anchor="ctr"/>
-          <a:lstStyle/>
-          <a:p>
-            <a:endParaRPr/>
-          </a:p>
-        </p:txBody>
-      </p:sp>
-      <p:sp>
-        <p:nvSpPr>
-          <p:cNvPr id="16" name="Rounded Rectangle 15"/>
-          <p:cNvSpPr/>
-          <p:nvPr/>
-        </p:nvSpPr>
-        <p:spPr>
-          <a:xfrm>
-            <a:off x="6931152" y="2395728"/>
-            <a:ext cx="4690872" cy="2999232"/>
-          </a:xfrm>
-          <a:prstGeom prst="roundRect">
-            <a:avLst>
-              <a:gd name="adj" fmla="val 8500"/>
             </a:avLst>
           </a:prstGeom>
           <a:solidFill>
@@ -12205,14 +11877,56 @@
       </p:sp>
       <p:sp>
         <p:nvSpPr>
-          <p:cNvPr id="17" name="TextBox 16"/>
+          <p:cNvPr id="13" name="TextBox 12"/>
           <p:cNvSpPr txBox="1"/>
           <p:nvPr/>
         </p:nvSpPr>
         <p:spPr>
           <a:xfrm>
-            <a:off x="7205472" y="2578608"/>
-            <a:ext cx="4142232" cy="219456"/>
+            <a:off x="4809744" y="2432304"/>
+            <a:ext cx="932688" cy="237744"/>
+          </a:xfrm>
+          <a:prstGeom prst="rect">
+            <a:avLst/>
+          </a:prstGeom>
+          <a:noFill/>
+        </p:spPr>
+        <p:txBody>
+          <a:bodyPr wrap="square" lIns="0" tIns="0" rIns="0" bIns="0" anchor="ctr">
+            <a:spAutoFit/>
+          </a:bodyPr>
+          <a:lstStyle/>
+          <a:p>
+            <a:pPr algn="ctr">
+              <a:spcBef>
+                <a:spcPts val="0"/>
+              </a:spcBef>
+              <a:spcAft>
+                <a:spcPts val="0"/>
+              </a:spcAft>
+            </a:pPr>
+            <a:r>
+              <a:rPr sz="850" b="1" i="0">
+                <a:solidFill>
+                  <a:srgbClr val="E1552B"/>
+                </a:solidFill>
+                <a:latin typeface="Calibri"/>
+              </a:rPr>
+              <a:t>HIGH</a:t>
+            </a:r>
+          </a:p>
+        </p:txBody>
+      </p:sp>
+      <p:sp>
+        <p:nvSpPr>
+          <p:cNvPr id="14" name="TextBox 13"/>
+          <p:cNvSpPr txBox="1"/>
+          <p:nvPr/>
+        </p:nvSpPr>
+        <p:spPr>
+          <a:xfrm>
+            <a:off x="822960" y="2761488"/>
+            <a:ext cx="4919472" cy="384048"/>
           </a:xfrm>
           <a:prstGeom prst="rect">
             <a:avLst/>
@@ -12226,6 +11940,9 @@
           <a:lstStyle/>
           <a:p>
             <a:pPr algn="l">
+              <a:lnSpc>
+                <a:spcPct val="116000"/>
+              </a:lnSpc>
               <a:spcBef>
                 <a:spcPts val="0"/>
               </a:spcBef>
@@ -12234,33 +11951,33 @@
               </a:spcAft>
             </a:pPr>
             <a:r>
-              <a:rPr sz="1100" b="1" i="0">
-                <a:solidFill>
-                  <a:srgbClr val="1C1815"/>
-                </a:solidFill>
-                <a:latin typeface="Calibri"/>
-              </a:rPr>
-              <a:t>ROI HIGHLIGHTS</a:t>
-            </a:r>
-          </a:p>
-        </p:txBody>
-      </p:sp>
-      <p:sp>
-        <p:nvSpPr>
-          <p:cNvPr id="18" name="Oval 17"/>
+              <a:rPr sz="950" b="0" i="0">
+                <a:solidFill>
+                  <a:srgbClr val="8B837C"/>
+                </a:solidFill>
+                <a:latin typeface="Calibri"/>
+              </a:rPr>
+              <a:t>Sensor drift, stuck-at values, clock skew and blown exposure silently corrupt any model downstream.</a:t>
+            </a:r>
+          </a:p>
+        </p:txBody>
+      </p:sp>
+      <p:sp>
+        <p:nvSpPr>
+          <p:cNvPr id="15" name="Rectangle 14"/>
           <p:cNvSpPr/>
           <p:nvPr/>
         </p:nvSpPr>
         <p:spPr>
           <a:xfrm>
-            <a:off x="7223760" y="3026664"/>
-            <a:ext cx="73152" cy="73152"/>
-          </a:xfrm>
-          <a:prstGeom prst="ellipse">
+            <a:off x="822960" y="3200400"/>
+            <a:ext cx="4919472" cy="10972"/>
+          </a:xfrm>
+          <a:prstGeom prst="rect">
             <a:avLst/>
           </a:prstGeom>
           <a:solidFill>
-            <a:srgbClr val="1C1815"/>
+            <a:srgbClr val="E7E1DC"/>
           </a:solidFill>
           <a:ln>
             <a:noFill/>
@@ -12291,14 +12008,14 @@
       </p:sp>
       <p:sp>
         <p:nvSpPr>
-          <p:cNvPr id="19" name="TextBox 18"/>
+          <p:cNvPr id="16" name="TextBox 15"/>
           <p:cNvSpPr txBox="1"/>
           <p:nvPr/>
         </p:nvSpPr>
         <p:spPr>
           <a:xfrm>
-            <a:off x="7443216" y="2962656"/>
-            <a:ext cx="3867912" cy="201168"/>
+            <a:off x="822960" y="3310128"/>
+            <a:ext cx="1280160" cy="182880"/>
           </a:xfrm>
           <a:prstGeom prst="rect">
             <a:avLst/>
@@ -12320,27 +12037,27 @@
               </a:spcAft>
             </a:pPr>
             <a:r>
-              <a:rPr sz="1100" b="1" i="0">
-                <a:solidFill>
-                  <a:srgbClr val="15120F"/>
-                </a:solidFill>
-                <a:latin typeface="Calibri"/>
-              </a:rPr>
-              <a:t>Cost avoidance per 100k units</a:t>
-            </a:r>
-          </a:p>
-        </p:txBody>
-      </p:sp>
-      <p:sp>
-        <p:nvSpPr>
-          <p:cNvPr id="20" name="TextBox 19"/>
+              <a:rPr sz="900" b="1" i="0">
+                <a:solidFill>
+                  <a:srgbClr val="1C1815"/>
+                </a:solidFill>
+                <a:latin typeface="Calibri"/>
+              </a:rPr>
+              <a:t>MITIGATION</a:t>
+            </a:r>
+          </a:p>
+        </p:txBody>
+      </p:sp>
+      <p:sp>
+        <p:nvSpPr>
+          <p:cNvPr id="17" name="TextBox 16"/>
           <p:cNvSpPr txBox="1"/>
           <p:nvPr/>
         </p:nvSpPr>
         <p:spPr>
           <a:xfrm>
-            <a:off x="7443216" y="3191256"/>
-            <a:ext cx="3867912" cy="384048"/>
+            <a:off x="822960" y="3511296"/>
+            <a:ext cx="4919472" cy="493776"/>
           </a:xfrm>
           <a:prstGeom prst="rect">
             <a:avLst/>
@@ -12355,7 +12072,7 @@
           <a:p>
             <a:pPr algn="l">
               <a:lnSpc>
-                <a:spcPct val="114000"/>
+                <a:spcPct val="116000"/>
               </a:lnSpc>
               <a:spcBef>
                 <a:spcPts val="0"/>
@@ -12365,420 +12082,27 @@
               </a:spcAft>
             </a:pPr>
             <a:r>
-              <a:rPr sz="919" b="0" i="0">
-                <a:solidFill>
-                  <a:srgbClr val="8B837C"/>
-                </a:solidFill>
-                <a:latin typeface="Calibri"/>
-              </a:rPr>
-              <a:t>2,800 fewer escaped defects at 34× the in-station resolution cost</a:t>
-            </a:r>
-          </a:p>
-        </p:txBody>
-      </p:sp>
-      <p:sp>
-        <p:nvSpPr>
-          <p:cNvPr id="21" name="Oval 20"/>
+              <a:rPr sz="950" b="0" i="0">
+                <a:solidFill>
+                  <a:srgbClr val="3B3530"/>
+                </a:solidFill>
+                <a:latin typeface="Calibri"/>
+              </a:rPr>
+              <a:t>Data-quality gate rejects ~3% of records and the rejection log is shown in-product. Dirty data is injected deliberately in test. Stuck-at and range detection run per signal.</a:t>
+            </a:r>
+          </a:p>
+        </p:txBody>
+      </p:sp>
+      <p:sp>
+        <p:nvSpPr>
+          <p:cNvPr id="18" name="Rounded Rectangle 17"/>
           <p:cNvSpPr/>
           <p:nvPr/>
         </p:nvSpPr>
         <p:spPr>
           <a:xfrm>
-            <a:off x="7223760" y="3630168"/>
-            <a:ext cx="73152" cy="73152"/>
-          </a:xfrm>
-          <a:prstGeom prst="ellipse">
-            <a:avLst/>
-          </a:prstGeom>
-          <a:solidFill>
-            <a:srgbClr val="1C1815"/>
-          </a:solidFill>
-          <a:ln>
-            <a:noFill/>
-          </a:ln>
-          <a:effectLst/>
-        </p:spPr>
-        <p:style>
-          <a:lnRef idx="1">
-            <a:schemeClr val="accent1"/>
-          </a:lnRef>
-          <a:fillRef idx="3">
-            <a:schemeClr val="accent1"/>
-          </a:fillRef>
-          <a:effectRef idx="2">
-            <a:schemeClr val="accent1"/>
-          </a:effectRef>
-          <a:fontRef idx="minor">
-            <a:schemeClr val="lt1"/>
-          </a:fontRef>
-        </p:style>
-        <p:txBody>
-          <a:bodyPr rtlCol="0" anchor="ctr"/>
-          <a:lstStyle/>
-          <a:p>
-            <a:endParaRPr/>
-          </a:p>
-        </p:txBody>
-      </p:sp>
-      <p:sp>
-        <p:nvSpPr>
-          <p:cNvPr id="22" name="TextBox 21"/>
-          <p:cNvSpPr txBox="1"/>
-          <p:nvPr/>
-        </p:nvSpPr>
-        <p:spPr>
-          <a:xfrm>
-            <a:off x="7443216" y="3566160"/>
-            <a:ext cx="3867912" cy="201168"/>
-          </a:xfrm>
-          <a:prstGeom prst="rect">
-            <a:avLst/>
-          </a:prstGeom>
-          <a:noFill/>
-        </p:spPr>
-        <p:txBody>
-          <a:bodyPr wrap="square" lIns="0" tIns="0" rIns="0" bIns="0" anchor="t">
-            <a:spAutoFit/>
-          </a:bodyPr>
-          <a:lstStyle/>
-          <a:p>
-            <a:pPr algn="l">
-              <a:spcBef>
-                <a:spcPts val="0"/>
-              </a:spcBef>
-              <a:spcAft>
-                <a:spcPts val="0"/>
-              </a:spcAft>
-            </a:pPr>
-            <a:r>
-              <a:rPr sz="1100" b="1" i="0">
-                <a:solidFill>
-                  <a:srgbClr val="15120F"/>
-                </a:solidFill>
-                <a:latin typeface="Calibri"/>
-              </a:rPr>
-              <a:t>Inspection labour released</a:t>
-            </a:r>
-          </a:p>
-        </p:txBody>
-      </p:sp>
-      <p:sp>
-        <p:nvSpPr>
-          <p:cNvPr id="23" name="TextBox 22"/>
-          <p:cNvSpPr txBox="1"/>
-          <p:nvPr/>
-        </p:nvSpPr>
-        <p:spPr>
-          <a:xfrm>
-            <a:off x="7443216" y="3794760"/>
-            <a:ext cx="3867912" cy="384048"/>
-          </a:xfrm>
-          <a:prstGeom prst="rect">
-            <a:avLst/>
-          </a:prstGeom>
-          <a:noFill/>
-        </p:spPr>
-        <p:txBody>
-          <a:bodyPr wrap="square" lIns="0" tIns="0" rIns="0" bIns="0" anchor="t">
-            <a:spAutoFit/>
-          </a:bodyPr>
-          <a:lstStyle/>
-          <a:p>
-            <a:pPr algn="l">
-              <a:lnSpc>
-                <a:spcPct val="114000"/>
-              </a:lnSpc>
-              <a:spcBef>
-                <a:spcPts val="0"/>
-              </a:spcBef>
-              <a:spcAft>
-                <a:spcPts val="0"/>
-              </a:spcAft>
-            </a:pPr>
-            <a:r>
-              <a:rPr sz="919" b="0" i="0">
-                <a:solidFill>
-                  <a:srgbClr val="8B837C"/>
-                </a:solidFill>
-                <a:latin typeface="Calibri"/>
-              </a:rPr>
-              <a:t>28 s saved per unit — redeployed to exception handling, not cut</a:t>
-            </a:r>
-          </a:p>
-        </p:txBody>
-      </p:sp>
-      <p:sp>
-        <p:nvSpPr>
-          <p:cNvPr id="24" name="Oval 23"/>
-          <p:cNvSpPr/>
-          <p:nvPr/>
-        </p:nvSpPr>
-        <p:spPr>
-          <a:xfrm>
-            <a:off x="7223760" y="4233672"/>
-            <a:ext cx="73152" cy="73152"/>
-          </a:xfrm>
-          <a:prstGeom prst="ellipse">
-            <a:avLst/>
-          </a:prstGeom>
-          <a:solidFill>
-            <a:srgbClr val="1C1815"/>
-          </a:solidFill>
-          <a:ln>
-            <a:noFill/>
-          </a:ln>
-          <a:effectLst/>
-        </p:spPr>
-        <p:style>
-          <a:lnRef idx="1">
-            <a:schemeClr val="accent1"/>
-          </a:lnRef>
-          <a:fillRef idx="3">
-            <a:schemeClr val="accent1"/>
-          </a:fillRef>
-          <a:effectRef idx="2">
-            <a:schemeClr val="accent1"/>
-          </a:effectRef>
-          <a:fontRef idx="minor">
-            <a:schemeClr val="lt1"/>
-          </a:fontRef>
-        </p:style>
-        <p:txBody>
-          <a:bodyPr rtlCol="0" anchor="ctr"/>
-          <a:lstStyle/>
-          <a:p>
-            <a:endParaRPr/>
-          </a:p>
-        </p:txBody>
-      </p:sp>
-      <p:sp>
-        <p:nvSpPr>
-          <p:cNvPr id="25" name="TextBox 24"/>
-          <p:cNvSpPr txBox="1"/>
-          <p:nvPr/>
-        </p:nvSpPr>
-        <p:spPr>
-          <a:xfrm>
-            <a:off x="7443216" y="4169664"/>
-            <a:ext cx="3867912" cy="201168"/>
-          </a:xfrm>
-          <a:prstGeom prst="rect">
-            <a:avLst/>
-          </a:prstGeom>
-          <a:noFill/>
-        </p:spPr>
-        <p:txBody>
-          <a:bodyPr wrap="square" lIns="0" tIns="0" rIns="0" bIns="0" anchor="t">
-            <a:spAutoFit/>
-          </a:bodyPr>
-          <a:lstStyle/>
-          <a:p>
-            <a:pPr algn="l">
-              <a:spcBef>
-                <a:spcPts val="0"/>
-              </a:spcBef>
-              <a:spcAft>
-                <a:spcPts val="0"/>
-              </a:spcAft>
-            </a:pPr>
-            <a:r>
-              <a:rPr sz="1100" b="1" i="0">
-                <a:solidFill>
-                  <a:srgbClr val="15120F"/>
-                </a:solidFill>
-                <a:latin typeface="Calibri"/>
-              </a:rPr>
-              <a:t>Warranty &amp; recall exposure</a:t>
-            </a:r>
-          </a:p>
-        </p:txBody>
-      </p:sp>
-      <p:sp>
-        <p:nvSpPr>
-          <p:cNvPr id="26" name="TextBox 25"/>
-          <p:cNvSpPr txBox="1"/>
-          <p:nvPr/>
-        </p:nvSpPr>
-        <p:spPr>
-          <a:xfrm>
-            <a:off x="7443216" y="4398264"/>
-            <a:ext cx="3867912" cy="384048"/>
-          </a:xfrm>
-          <a:prstGeom prst="rect">
-            <a:avLst/>
-          </a:prstGeom>
-          <a:noFill/>
-        </p:spPr>
-        <p:txBody>
-          <a:bodyPr wrap="square" lIns="0" tIns="0" rIns="0" bIns="0" anchor="t">
-            <a:spAutoFit/>
-          </a:bodyPr>
-          <a:lstStyle/>
-          <a:p>
-            <a:pPr algn="l">
-              <a:lnSpc>
-                <a:spcPct val="114000"/>
-              </a:lnSpc>
-              <a:spcBef>
-                <a:spcPts val="0"/>
-              </a:spcBef>
-              <a:spcAft>
-                <a:spcPts val="0"/>
-              </a:spcAft>
-            </a:pPr>
-            <a:r>
-              <a:rPr sz="919" b="0" i="0">
-                <a:solidFill>
-                  <a:srgbClr val="8B837C"/>
-                </a:solidFill>
-                <a:latin typeface="Calibri"/>
-              </a:rPr>
-              <a:t>Primary driver: the fusion-only class is the one that reaches the field</a:t>
-            </a:r>
-          </a:p>
-        </p:txBody>
-      </p:sp>
-      <p:sp>
-        <p:nvSpPr>
-          <p:cNvPr id="27" name="Oval 26"/>
-          <p:cNvSpPr/>
-          <p:nvPr/>
-        </p:nvSpPr>
-        <p:spPr>
-          <a:xfrm>
-            <a:off x="7223760" y="4837176"/>
-            <a:ext cx="73152" cy="73152"/>
-          </a:xfrm>
-          <a:prstGeom prst="ellipse">
-            <a:avLst/>
-          </a:prstGeom>
-          <a:solidFill>
-            <a:srgbClr val="1C1815"/>
-          </a:solidFill>
-          <a:ln>
-            <a:noFill/>
-          </a:ln>
-          <a:effectLst/>
-        </p:spPr>
-        <p:style>
-          <a:lnRef idx="1">
-            <a:schemeClr val="accent1"/>
-          </a:lnRef>
-          <a:fillRef idx="3">
-            <a:schemeClr val="accent1"/>
-          </a:fillRef>
-          <a:effectRef idx="2">
-            <a:schemeClr val="accent1"/>
-          </a:effectRef>
-          <a:fontRef idx="minor">
-            <a:schemeClr val="lt1"/>
-          </a:fontRef>
-        </p:style>
-        <p:txBody>
-          <a:bodyPr rtlCol="0" anchor="ctr"/>
-          <a:lstStyle/>
-          <a:p>
-            <a:endParaRPr/>
-          </a:p>
-        </p:txBody>
-      </p:sp>
-      <p:sp>
-        <p:nvSpPr>
-          <p:cNvPr id="28" name="TextBox 27"/>
-          <p:cNvSpPr txBox="1"/>
-          <p:nvPr/>
-        </p:nvSpPr>
-        <p:spPr>
-          <a:xfrm>
-            <a:off x="7443216" y="4773168"/>
-            <a:ext cx="3867912" cy="201168"/>
-          </a:xfrm>
-          <a:prstGeom prst="rect">
-            <a:avLst/>
-          </a:prstGeom>
-          <a:noFill/>
-        </p:spPr>
-        <p:txBody>
-          <a:bodyPr wrap="square" lIns="0" tIns="0" rIns="0" bIns="0" anchor="t">
-            <a:spAutoFit/>
-          </a:bodyPr>
-          <a:lstStyle/>
-          <a:p>
-            <a:pPr algn="l">
-              <a:spcBef>
-                <a:spcPts val="0"/>
-              </a:spcBef>
-              <a:spcAft>
-                <a:spcPts val="0"/>
-              </a:spcAft>
-            </a:pPr>
-            <a:r>
-              <a:rPr sz="1100" b="1" i="0">
-                <a:solidFill>
-                  <a:srgbClr val="15120F"/>
-                </a:solidFill>
-                <a:latin typeface="Calibri"/>
-              </a:rPr>
-              <a:t>Payback period</a:t>
-            </a:r>
-          </a:p>
-        </p:txBody>
-      </p:sp>
-      <p:sp>
-        <p:nvSpPr>
-          <p:cNvPr id="29" name="TextBox 28"/>
-          <p:cNvSpPr txBox="1"/>
-          <p:nvPr/>
-        </p:nvSpPr>
-        <p:spPr>
-          <a:xfrm>
-            <a:off x="7443216" y="5001768"/>
-            <a:ext cx="3867912" cy="384048"/>
-          </a:xfrm>
-          <a:prstGeom prst="rect">
-            <a:avLst/>
-          </a:prstGeom>
-          <a:noFill/>
-        </p:spPr>
-        <p:txBody>
-          <a:bodyPr wrap="square" lIns="0" tIns="0" rIns="0" bIns="0" anchor="t">
-            <a:spAutoFit/>
-          </a:bodyPr>
-          <a:lstStyle/>
-          <a:p>
-            <a:pPr algn="l">
-              <a:lnSpc>
-                <a:spcPct val="114000"/>
-              </a:lnSpc>
-              <a:spcBef>
-                <a:spcPts val="0"/>
-              </a:spcBef>
-              <a:spcAft>
-                <a:spcPts val="0"/>
-              </a:spcAft>
-            </a:pPr>
-            <a:r>
-              <a:rPr sz="919" b="0" i="0">
-                <a:solidFill>
-                  <a:srgbClr val="8B837C"/>
-                </a:solidFill>
-                <a:latin typeface="Calibri"/>
-              </a:rPr>
-              <a:t>Under one quarter at pilot volumes, dominated by avoided rework</a:t>
-            </a:r>
-          </a:p>
-        </p:txBody>
-      </p:sp>
-      <p:sp>
-        <p:nvSpPr>
-          <p:cNvPr id="30" name="Rounded Rectangle 29"/>
-          <p:cNvSpPr/>
-          <p:nvPr/>
-        </p:nvSpPr>
-        <p:spPr>
-          <a:xfrm>
-            <a:off x="596188" y="5579668"/>
-            <a:ext cx="2647188" cy="658368"/>
+            <a:off x="6219748" y="2269540"/>
+            <a:ext cx="5431536" cy="1883664"/>
           </a:xfrm>
           <a:prstGeom prst="roundRect">
             <a:avLst>
@@ -12817,14 +12141,14 @@
       </p:sp>
       <p:sp>
         <p:nvSpPr>
-          <p:cNvPr id="31" name="Rounded Rectangle 30"/>
+          <p:cNvPr id="19" name="Rounded Rectangle 18"/>
           <p:cNvSpPr/>
           <p:nvPr/>
         </p:nvSpPr>
         <p:spPr>
           <a:xfrm>
-            <a:off x="566928" y="5541264"/>
-            <a:ext cx="2647188" cy="658368"/>
+            <a:off x="6190488" y="2231136"/>
+            <a:ext cx="5431536" cy="1883664"/>
           </a:xfrm>
           <a:prstGeom prst="roundRect">
             <a:avLst>
@@ -12832,7 +12156,7 @@
             </a:avLst>
           </a:prstGeom>
           <a:solidFill>
-            <a:srgbClr val="F7F4F2"/>
+            <a:srgbClr val="FFFFFF"/>
           </a:solidFill>
           <a:ln w="12700">
             <a:solidFill>
@@ -12865,14 +12189,14 @@
       </p:sp>
       <p:sp>
         <p:nvSpPr>
-          <p:cNvPr id="32" name="TextBox 31"/>
+          <p:cNvPr id="20" name="TextBox 19"/>
           <p:cNvSpPr txBox="1"/>
           <p:nvPr/>
         </p:nvSpPr>
         <p:spPr>
           <a:xfrm>
-            <a:off x="768096" y="5632704"/>
-            <a:ext cx="2244852" cy="256032"/>
+            <a:off x="6446520" y="2432304"/>
+            <a:ext cx="3566160" cy="237744"/>
           </a:xfrm>
           <a:prstGeom prst="rect">
             <a:avLst/>
@@ -12894,27 +12218,117 @@
               </a:spcAft>
             </a:pPr>
             <a:r>
-              <a:rPr sz="1500" b="1" i="0">
-                <a:solidFill>
-                  <a:srgbClr val="1C1815"/>
-                </a:solidFill>
-                <a:latin typeface="Calibri"/>
-              </a:rPr>
-              <a:t>4.2 → 1.4</a:t>
-            </a:r>
-          </a:p>
-        </p:txBody>
-      </p:sp>
-      <p:sp>
-        <p:nvSpPr>
-          <p:cNvPr id="33" name="TextBox 32"/>
+              <a:rPr sz="1250" b="1" i="0">
+                <a:solidFill>
+                  <a:srgbClr val="15120F"/>
+                </a:solidFill>
+                <a:latin typeface="Calibri"/>
+              </a:rPr>
+              <a:t>USER ADOPTION</a:t>
+            </a:r>
+          </a:p>
+        </p:txBody>
+      </p:sp>
+      <p:sp>
+        <p:nvSpPr>
+          <p:cNvPr id="21" name="Rounded Rectangle 20"/>
+          <p:cNvSpPr/>
+          <p:nvPr/>
+        </p:nvSpPr>
+        <p:spPr>
+          <a:xfrm>
+            <a:off x="10433304" y="2432304"/>
+            <a:ext cx="932688" cy="237744"/>
+          </a:xfrm>
+          <a:prstGeom prst="roundRect">
+            <a:avLst>
+              <a:gd name="adj" fmla="val 50000"/>
+            </a:avLst>
+          </a:prstGeom>
+          <a:solidFill>
+            <a:srgbClr val="FFFFFF"/>
+          </a:solidFill>
+          <a:ln w="12700">
+            <a:solidFill>
+              <a:srgbClr val="E1552B"/>
+            </a:solidFill>
+          </a:ln>
+          <a:effectLst/>
+        </p:spPr>
+        <p:style>
+          <a:lnRef idx="1">
+            <a:schemeClr val="accent1"/>
+          </a:lnRef>
+          <a:fillRef idx="3">
+            <a:schemeClr val="accent1"/>
+          </a:fillRef>
+          <a:effectRef idx="2">
+            <a:schemeClr val="accent1"/>
+          </a:effectRef>
+          <a:fontRef idx="minor">
+            <a:schemeClr val="lt1"/>
+          </a:fontRef>
+        </p:style>
+        <p:txBody>
+          <a:bodyPr rtlCol="0" anchor="ctr"/>
+          <a:lstStyle/>
+          <a:p>
+            <a:endParaRPr/>
+          </a:p>
+        </p:txBody>
+      </p:sp>
+      <p:sp>
+        <p:nvSpPr>
+          <p:cNvPr id="22" name="TextBox 21"/>
           <p:cNvSpPr txBox="1"/>
           <p:nvPr/>
         </p:nvSpPr>
         <p:spPr>
           <a:xfrm>
-            <a:off x="768096" y="5925312"/>
-            <a:ext cx="2244852" cy="219456"/>
+            <a:off x="10433304" y="2432304"/>
+            <a:ext cx="932688" cy="237744"/>
+          </a:xfrm>
+          <a:prstGeom prst="rect">
+            <a:avLst/>
+          </a:prstGeom>
+          <a:noFill/>
+        </p:spPr>
+        <p:txBody>
+          <a:bodyPr wrap="square" lIns="0" tIns="0" rIns="0" bIns="0" anchor="ctr">
+            <a:spAutoFit/>
+          </a:bodyPr>
+          <a:lstStyle/>
+          <a:p>
+            <a:pPr algn="ctr">
+              <a:spcBef>
+                <a:spcPts val="0"/>
+              </a:spcBef>
+              <a:spcAft>
+                <a:spcPts val="0"/>
+              </a:spcAft>
+            </a:pPr>
+            <a:r>
+              <a:rPr sz="850" b="1" i="0">
+                <a:solidFill>
+                  <a:srgbClr val="E1552B"/>
+                </a:solidFill>
+                <a:latin typeface="Calibri"/>
+              </a:rPr>
+              <a:t>HIGH</a:t>
+            </a:r>
+          </a:p>
+        </p:txBody>
+      </p:sp>
+      <p:sp>
+        <p:nvSpPr>
+          <p:cNvPr id="23" name="TextBox 22"/>
+          <p:cNvSpPr txBox="1"/>
+          <p:nvPr/>
+        </p:nvSpPr>
+        <p:spPr>
+          <a:xfrm>
+            <a:off x="6446520" y="2761488"/>
+            <a:ext cx="4919472" cy="384048"/>
           </a:xfrm>
           <a:prstGeom prst="rect">
             <a:avLst/>
@@ -12928,6 +12342,9 @@
           <a:lstStyle/>
           <a:p>
             <a:pPr algn="l">
+              <a:lnSpc>
+                <a:spcPct val="116000"/>
+              </a:lnSpc>
               <a:spcBef>
                 <a:spcPts val="0"/>
               </a:spcBef>
@@ -12936,27 +12353,158 @@
               </a:spcAft>
             </a:pPr>
             <a:r>
-              <a:rPr sz="900" b="0" i="0">
+              <a:rPr sz="950" b="0" i="0">
                 <a:solidFill>
                   <a:srgbClr val="8B837C"/>
                 </a:solidFill>
                 <a:latin typeface="Calibri"/>
               </a:rPr>
-              <a:t>Escaped defects / 1,000 units</a:t>
-            </a:r>
-          </a:p>
-        </p:txBody>
-      </p:sp>
-      <p:sp>
-        <p:nvSpPr>
-          <p:cNvPr id="34" name="Rounded Rectangle 33"/>
+              <a:t>Operators switch off an inspector that cries wolf, and then there is no inspector at all.</a:t>
+            </a:r>
+          </a:p>
+        </p:txBody>
+      </p:sp>
+      <p:sp>
+        <p:nvSpPr>
+          <p:cNvPr id="24" name="Rectangle 23"/>
           <p:cNvSpPr/>
           <p:nvPr/>
         </p:nvSpPr>
         <p:spPr>
           <a:xfrm>
-            <a:off x="3366820" y="5579668"/>
-            <a:ext cx="2647188" cy="658368"/>
+            <a:off x="6446520" y="3200400"/>
+            <a:ext cx="4919472" cy="10972"/>
+          </a:xfrm>
+          <a:prstGeom prst="rect">
+            <a:avLst/>
+          </a:prstGeom>
+          <a:solidFill>
+            <a:srgbClr val="E7E1DC"/>
+          </a:solidFill>
+          <a:ln>
+            <a:noFill/>
+          </a:ln>
+          <a:effectLst/>
+        </p:spPr>
+        <p:style>
+          <a:lnRef idx="1">
+            <a:schemeClr val="accent1"/>
+          </a:lnRef>
+          <a:fillRef idx="3">
+            <a:schemeClr val="accent1"/>
+          </a:fillRef>
+          <a:effectRef idx="2">
+            <a:schemeClr val="accent1"/>
+          </a:effectRef>
+          <a:fontRef idx="minor">
+            <a:schemeClr val="lt1"/>
+          </a:fontRef>
+        </p:style>
+        <p:txBody>
+          <a:bodyPr rtlCol="0" anchor="ctr"/>
+          <a:lstStyle/>
+          <a:p>
+            <a:endParaRPr/>
+          </a:p>
+        </p:txBody>
+      </p:sp>
+      <p:sp>
+        <p:nvSpPr>
+          <p:cNvPr id="25" name="TextBox 24"/>
+          <p:cNvSpPr txBox="1"/>
+          <p:nvPr/>
+        </p:nvSpPr>
+        <p:spPr>
+          <a:xfrm>
+            <a:off x="6446520" y="3310128"/>
+            <a:ext cx="1280160" cy="182880"/>
+          </a:xfrm>
+          <a:prstGeom prst="rect">
+            <a:avLst/>
+          </a:prstGeom>
+          <a:noFill/>
+        </p:spPr>
+        <p:txBody>
+          <a:bodyPr wrap="square" lIns="0" tIns="0" rIns="0" bIns="0" anchor="t">
+            <a:spAutoFit/>
+          </a:bodyPr>
+          <a:lstStyle/>
+          <a:p>
+            <a:pPr algn="l">
+              <a:spcBef>
+                <a:spcPts val="0"/>
+              </a:spcBef>
+              <a:spcAft>
+                <a:spcPts val="0"/>
+              </a:spcAft>
+            </a:pPr>
+            <a:r>
+              <a:rPr sz="900" b="1" i="0">
+                <a:solidFill>
+                  <a:srgbClr val="1C1815"/>
+                </a:solidFill>
+                <a:latin typeface="Calibri"/>
+              </a:rPr>
+              <a:t>MITIGATION</a:t>
+            </a:r>
+          </a:p>
+        </p:txBody>
+      </p:sp>
+      <p:sp>
+        <p:nvSpPr>
+          <p:cNvPr id="26" name="TextBox 25"/>
+          <p:cNvSpPr txBox="1"/>
+          <p:nvPr/>
+        </p:nvSpPr>
+        <p:spPr>
+          <a:xfrm>
+            <a:off x="6446520" y="3511296"/>
+            <a:ext cx="4919472" cy="493776"/>
+          </a:xfrm>
+          <a:prstGeom prst="rect">
+            <a:avLst/>
+          </a:prstGeom>
+          <a:noFill/>
+        </p:spPr>
+        <p:txBody>
+          <a:bodyPr wrap="square" lIns="0" tIns="0" rIns="0" bIns="0" anchor="t">
+            <a:spAutoFit/>
+          </a:bodyPr>
+          <a:lstStyle/>
+          <a:p>
+            <a:pPr algn="l">
+              <a:lnSpc>
+                <a:spcPct val="116000"/>
+              </a:lnSpc>
+              <a:spcBef>
+                <a:spcPts val="0"/>
+              </a:spcBef>
+              <a:spcAft>
+                <a:spcPts val="0"/>
+              </a:spcAft>
+            </a:pPr>
+            <a:r>
+              <a:rPr sz="950" b="0" i="0">
+                <a:solidFill>
+                  <a:srgbClr val="3B3530"/>
+                </a:solidFill>
+                <a:latin typeface="Calibri"/>
+              </a:rPr>
+              <a:t>False positives held at ≤2% on clean runs. Role-aware explanation depth. Operator feedback visibly changes thresholds, so correcting the system is worth the operator's time.</a:t>
+            </a:r>
+          </a:p>
+        </p:txBody>
+      </p:sp>
+      <p:sp>
+        <p:nvSpPr>
+          <p:cNvPr id="27" name="Rounded Rectangle 26"/>
+          <p:cNvSpPr/>
+          <p:nvPr/>
+        </p:nvSpPr>
+        <p:spPr>
+          <a:xfrm>
+            <a:off x="596188" y="4336084"/>
+            <a:ext cx="5431536" cy="1883664"/>
           </a:xfrm>
           <a:prstGeom prst="roundRect">
             <a:avLst>
@@ -12995,14 +12543,14 @@
       </p:sp>
       <p:sp>
         <p:nvSpPr>
-          <p:cNvPr id="35" name="Rounded Rectangle 34"/>
+          <p:cNvPr id="28" name="Rounded Rectangle 27"/>
           <p:cNvSpPr/>
           <p:nvPr/>
         </p:nvSpPr>
         <p:spPr>
           <a:xfrm>
-            <a:off x="3337560" y="5541264"/>
-            <a:ext cx="2647188" cy="658368"/>
+            <a:off x="566928" y="4297680"/>
+            <a:ext cx="5431536" cy="1883664"/>
           </a:xfrm>
           <a:prstGeom prst="roundRect">
             <a:avLst>
@@ -13010,7 +12558,7 @@
             </a:avLst>
           </a:prstGeom>
           <a:solidFill>
-            <a:srgbClr val="F7F4F2"/>
+            <a:srgbClr val="FFFFFF"/>
           </a:solidFill>
           <a:ln w="12700">
             <a:solidFill>
@@ -13043,14 +12591,14 @@
       </p:sp>
       <p:sp>
         <p:nvSpPr>
-          <p:cNvPr id="36" name="TextBox 35"/>
+          <p:cNvPr id="29" name="TextBox 28"/>
           <p:cNvSpPr txBox="1"/>
           <p:nvPr/>
         </p:nvSpPr>
         <p:spPr>
           <a:xfrm>
-            <a:off x="3538728" y="5632704"/>
-            <a:ext cx="2244852" cy="256032"/>
+            <a:off x="822960" y="4498848"/>
+            <a:ext cx="3566160" cy="237744"/>
           </a:xfrm>
           <a:prstGeom prst="rect">
             <a:avLst/>
@@ -13072,27 +12620,117 @@
               </a:spcAft>
             </a:pPr>
             <a:r>
-              <a:rPr sz="1500" b="1" i="0">
-                <a:solidFill>
-                  <a:srgbClr val="E1552B"/>
-                </a:solidFill>
-                <a:latin typeface="Calibri"/>
-              </a:rPr>
-              <a:t>6.5 h → 1.4 h</a:t>
-            </a:r>
-          </a:p>
-        </p:txBody>
-      </p:sp>
-      <p:sp>
-        <p:nvSpPr>
-          <p:cNvPr id="37" name="TextBox 36"/>
+              <a:rPr sz="1250" b="1" i="0">
+                <a:solidFill>
+                  <a:srgbClr val="15120F"/>
+                </a:solidFill>
+                <a:latin typeface="Calibri"/>
+              </a:rPr>
+              <a:t>INTEGRATION COMPLEXITY</a:t>
+            </a:r>
+          </a:p>
+        </p:txBody>
+      </p:sp>
+      <p:sp>
+        <p:nvSpPr>
+          <p:cNvPr id="30" name="Rounded Rectangle 29"/>
+          <p:cNvSpPr/>
+          <p:nvPr/>
+        </p:nvSpPr>
+        <p:spPr>
+          <a:xfrm>
+            <a:off x="4809744" y="4498848"/>
+            <a:ext cx="932688" cy="237744"/>
+          </a:xfrm>
+          <a:prstGeom prst="roundRect">
+            <a:avLst>
+              <a:gd name="adj" fmla="val 50000"/>
+            </a:avLst>
+          </a:prstGeom>
+          <a:solidFill>
+            <a:srgbClr val="FFFFFF"/>
+          </a:solidFill>
+          <a:ln w="12700">
+            <a:solidFill>
+              <a:srgbClr val="1C1815"/>
+            </a:solidFill>
+          </a:ln>
+          <a:effectLst/>
+        </p:spPr>
+        <p:style>
+          <a:lnRef idx="1">
+            <a:schemeClr val="accent1"/>
+          </a:lnRef>
+          <a:fillRef idx="3">
+            <a:schemeClr val="accent1"/>
+          </a:fillRef>
+          <a:effectRef idx="2">
+            <a:schemeClr val="accent1"/>
+          </a:effectRef>
+          <a:fontRef idx="minor">
+            <a:schemeClr val="lt1"/>
+          </a:fontRef>
+        </p:style>
+        <p:txBody>
+          <a:bodyPr rtlCol="0" anchor="ctr"/>
+          <a:lstStyle/>
+          <a:p>
+            <a:endParaRPr/>
+          </a:p>
+        </p:txBody>
+      </p:sp>
+      <p:sp>
+        <p:nvSpPr>
+          <p:cNvPr id="31" name="TextBox 30"/>
           <p:cNvSpPr txBox="1"/>
           <p:nvPr/>
         </p:nvSpPr>
         <p:spPr>
           <a:xfrm>
-            <a:off x="3538728" y="5925312"/>
-            <a:ext cx="2244852" cy="219456"/>
+            <a:off x="4809744" y="4498848"/>
+            <a:ext cx="932688" cy="237744"/>
+          </a:xfrm>
+          <a:prstGeom prst="rect">
+            <a:avLst/>
+          </a:prstGeom>
+          <a:noFill/>
+        </p:spPr>
+        <p:txBody>
+          <a:bodyPr wrap="square" lIns="0" tIns="0" rIns="0" bIns="0" anchor="ctr">
+            <a:spAutoFit/>
+          </a:bodyPr>
+          <a:lstStyle/>
+          <a:p>
+            <a:pPr algn="ctr">
+              <a:spcBef>
+                <a:spcPts val="0"/>
+              </a:spcBef>
+              <a:spcAft>
+                <a:spcPts val="0"/>
+              </a:spcAft>
+            </a:pPr>
+            <a:r>
+              <a:rPr sz="850" b="1" i="0">
+                <a:solidFill>
+                  <a:srgbClr val="1C1815"/>
+                </a:solidFill>
+                <a:latin typeface="Calibri"/>
+              </a:rPr>
+              <a:t>MEDIUM</a:t>
+            </a:r>
+          </a:p>
+        </p:txBody>
+      </p:sp>
+      <p:sp>
+        <p:nvSpPr>
+          <p:cNvPr id="32" name="TextBox 31"/>
+          <p:cNvSpPr txBox="1"/>
+          <p:nvPr/>
+        </p:nvSpPr>
+        <p:spPr>
+          <a:xfrm>
+            <a:off x="822960" y="4828032"/>
+            <a:ext cx="4919472" cy="384048"/>
           </a:xfrm>
           <a:prstGeom prst="rect">
             <a:avLst/>
@@ -13106,6 +12744,9 @@
           <a:lstStyle/>
           <a:p>
             <a:pPr algn="l">
+              <a:lnSpc>
+                <a:spcPct val="116000"/>
+              </a:lnSpc>
               <a:spcBef>
                 <a:spcPts val="0"/>
               </a:spcBef>
@@ -13114,27 +12755,158 @@
               </a:spcAft>
             </a:pPr>
             <a:r>
-              <a:rPr sz="900" b="0" i="0">
+              <a:rPr sz="950" b="0" i="0">
                 <a:solidFill>
                   <a:srgbClr val="8B837C"/>
                 </a:solidFill>
                 <a:latin typeface="Calibri"/>
               </a:rPr>
-              <a:t>Mean time to root cause</a:t>
-            </a:r>
-          </a:p>
-        </p:txBody>
-      </p:sp>
-      <p:sp>
-        <p:nvSpPr>
-          <p:cNvPr id="38" name="Rounded Rectangle 37"/>
+              <a:t>MES, tool controllers, ticketing and notification each carry their own protocol, latency and failure mode.</a:t>
+            </a:r>
+          </a:p>
+        </p:txBody>
+      </p:sp>
+      <p:sp>
+        <p:nvSpPr>
+          <p:cNvPr id="33" name="Rectangle 32"/>
           <p:cNvSpPr/>
           <p:nvPr/>
         </p:nvSpPr>
         <p:spPr>
           <a:xfrm>
-            <a:off x="6137452" y="5579668"/>
-            <a:ext cx="2647188" cy="658368"/>
+            <a:off x="822960" y="5266944"/>
+            <a:ext cx="4919472" cy="10972"/>
+          </a:xfrm>
+          <a:prstGeom prst="rect">
+            <a:avLst/>
+          </a:prstGeom>
+          <a:solidFill>
+            <a:srgbClr val="E7E1DC"/>
+          </a:solidFill>
+          <a:ln>
+            <a:noFill/>
+          </a:ln>
+          <a:effectLst/>
+        </p:spPr>
+        <p:style>
+          <a:lnRef idx="1">
+            <a:schemeClr val="accent1"/>
+          </a:lnRef>
+          <a:fillRef idx="3">
+            <a:schemeClr val="accent1"/>
+          </a:fillRef>
+          <a:effectRef idx="2">
+            <a:schemeClr val="accent1"/>
+          </a:effectRef>
+          <a:fontRef idx="minor">
+            <a:schemeClr val="lt1"/>
+          </a:fontRef>
+        </p:style>
+        <p:txBody>
+          <a:bodyPr rtlCol="0" anchor="ctr"/>
+          <a:lstStyle/>
+          <a:p>
+            <a:endParaRPr/>
+          </a:p>
+        </p:txBody>
+      </p:sp>
+      <p:sp>
+        <p:nvSpPr>
+          <p:cNvPr id="34" name="TextBox 33"/>
+          <p:cNvSpPr txBox="1"/>
+          <p:nvPr/>
+        </p:nvSpPr>
+        <p:spPr>
+          <a:xfrm>
+            <a:off x="822960" y="5376672"/>
+            <a:ext cx="1280160" cy="182880"/>
+          </a:xfrm>
+          <a:prstGeom prst="rect">
+            <a:avLst/>
+          </a:prstGeom>
+          <a:noFill/>
+        </p:spPr>
+        <p:txBody>
+          <a:bodyPr wrap="square" lIns="0" tIns="0" rIns="0" bIns="0" anchor="t">
+            <a:spAutoFit/>
+          </a:bodyPr>
+          <a:lstStyle/>
+          <a:p>
+            <a:pPr algn="l">
+              <a:spcBef>
+                <a:spcPts val="0"/>
+              </a:spcBef>
+              <a:spcAft>
+                <a:spcPts val="0"/>
+              </a:spcAft>
+            </a:pPr>
+            <a:r>
+              <a:rPr sz="900" b="1" i="0">
+                <a:solidFill>
+                  <a:srgbClr val="1C1815"/>
+                </a:solidFill>
+                <a:latin typeface="Calibri"/>
+              </a:rPr>
+              <a:t>MITIGATION</a:t>
+            </a:r>
+          </a:p>
+        </p:txBody>
+      </p:sp>
+      <p:sp>
+        <p:nvSpPr>
+          <p:cNvPr id="35" name="TextBox 34"/>
+          <p:cNvSpPr txBox="1"/>
+          <p:nvPr/>
+        </p:nvSpPr>
+        <p:spPr>
+          <a:xfrm>
+            <a:off x="822960" y="5577840"/>
+            <a:ext cx="4919472" cy="493776"/>
+          </a:xfrm>
+          <a:prstGeom prst="rect">
+            <a:avLst/>
+          </a:prstGeom>
+          <a:noFill/>
+        </p:spPr>
+        <p:txBody>
+          <a:bodyPr wrap="square" lIns="0" tIns="0" rIns="0" bIns="0" anchor="t">
+            <a:spAutoFit/>
+          </a:bodyPr>
+          <a:lstStyle/>
+          <a:p>
+            <a:pPr algn="l">
+              <a:lnSpc>
+                <a:spcPct val="116000"/>
+              </a:lnSpc>
+              <a:spcBef>
+                <a:spcPts val="0"/>
+              </a:spcBef>
+              <a:spcAft>
+                <a:spcPts val="0"/>
+              </a:spcAft>
+            </a:pPr>
+            <a:r>
+              <a:rPr sz="950" b="0" i="0">
+                <a:solidFill>
+                  <a:srgbClr val="3B3530"/>
+                </a:solidFill>
+                <a:latin typeface="Calibri"/>
+              </a:rPr>
+              <a:t>Every external system sits behind an interface with a real and a fake implementation. Circuit breakers, retries with jitter, idempotency keys and bulkheads on every outbound call.</a:t>
+            </a:r>
+          </a:p>
+        </p:txBody>
+      </p:sp>
+      <p:sp>
+        <p:nvSpPr>
+          <p:cNvPr id="36" name="Rounded Rectangle 35"/>
+          <p:cNvSpPr/>
+          <p:nvPr/>
+        </p:nvSpPr>
+        <p:spPr>
+          <a:xfrm>
+            <a:off x="6219748" y="4336084"/>
+            <a:ext cx="5431536" cy="1883664"/>
           </a:xfrm>
           <a:prstGeom prst="roundRect">
             <a:avLst>
@@ -13173,14 +12945,14 @@
       </p:sp>
       <p:sp>
         <p:nvSpPr>
-          <p:cNvPr id="39" name="Rounded Rectangle 38"/>
+          <p:cNvPr id="37" name="Rounded Rectangle 36"/>
           <p:cNvSpPr/>
           <p:nvPr/>
         </p:nvSpPr>
         <p:spPr>
           <a:xfrm>
-            <a:off x="6108192" y="5541264"/>
-            <a:ext cx="2647188" cy="658368"/>
+            <a:off x="6190488" y="4297680"/>
+            <a:ext cx="5431536" cy="1883664"/>
           </a:xfrm>
           <a:prstGeom prst="roundRect">
             <a:avLst>
@@ -13188,7 +12960,7 @@
             </a:avLst>
           </a:prstGeom>
           <a:solidFill>
-            <a:srgbClr val="F7F4F2"/>
+            <a:srgbClr val="FFFFFF"/>
           </a:solidFill>
           <a:ln w="12700">
             <a:solidFill>
@@ -13221,14 +12993,14 @@
       </p:sp>
       <p:sp>
         <p:nvSpPr>
-          <p:cNvPr id="40" name="TextBox 39"/>
+          <p:cNvPr id="38" name="TextBox 37"/>
           <p:cNvSpPr txBox="1"/>
           <p:nvPr/>
         </p:nvSpPr>
         <p:spPr>
           <a:xfrm>
-            <a:off x="6309360" y="5632704"/>
-            <a:ext cx="2244852" cy="256032"/>
+            <a:off x="6446520" y="4498848"/>
+            <a:ext cx="3566160" cy="237744"/>
           </a:xfrm>
           <a:prstGeom prst="rect">
             <a:avLst/>
@@ -13250,80 +13022,40 @@
               </a:spcAft>
             </a:pPr>
             <a:r>
-              <a:rPr sz="1500" b="1" i="0">
-                <a:solidFill>
-                  <a:srgbClr val="1C1815"/>
-                </a:solidFill>
-                <a:latin typeface="Calibri"/>
-              </a:rPr>
-              <a:t>48 s → 20 s</a:t>
-            </a:r>
-          </a:p>
-        </p:txBody>
-      </p:sp>
-      <p:sp>
-        <p:nvSpPr>
-          <p:cNvPr id="41" name="TextBox 40"/>
-          <p:cNvSpPr txBox="1"/>
-          <p:nvPr/>
-        </p:nvSpPr>
-        <p:spPr>
-          <a:xfrm>
-            <a:off x="6309360" y="5925312"/>
-            <a:ext cx="2244852" cy="219456"/>
-          </a:xfrm>
-          <a:prstGeom prst="rect">
-            <a:avLst/>
-          </a:prstGeom>
-          <a:noFill/>
-        </p:spPr>
-        <p:txBody>
-          <a:bodyPr wrap="square" lIns="0" tIns="0" rIns="0" bIns="0" anchor="t">
-            <a:spAutoFit/>
-          </a:bodyPr>
-          <a:lstStyle/>
-          <a:p>
-            <a:pPr algn="l">
-              <a:spcBef>
-                <a:spcPts val="0"/>
-              </a:spcBef>
-              <a:spcAft>
-                <a:spcPts val="0"/>
-              </a:spcAft>
-            </a:pPr>
-            <a:r>
-              <a:rPr sz="900" b="0" i="0">
-                <a:solidFill>
-                  <a:srgbClr val="8B837C"/>
-                </a:solidFill>
-                <a:latin typeface="Calibri"/>
-              </a:rPr>
-              <a:t>Inspection time per unit</a:t>
-            </a:r>
-          </a:p>
-        </p:txBody>
-      </p:sp>
-      <p:sp>
-        <p:nvSpPr>
-          <p:cNvPr id="42" name="Rounded Rectangle 41"/>
+              <a:rPr sz="1250" b="1" i="0">
+                <a:solidFill>
+                  <a:srgbClr val="15120F"/>
+                </a:solidFill>
+                <a:latin typeface="Calibri"/>
+              </a:rPr>
+              <a:t>GOVERNANCE &amp; COMPLIANCE</a:t>
+            </a:r>
+          </a:p>
+        </p:txBody>
+      </p:sp>
+      <p:sp>
+        <p:nvSpPr>
+          <p:cNvPr id="39" name="Rounded Rectangle 38"/>
           <p:cNvSpPr/>
           <p:nvPr/>
         </p:nvSpPr>
         <p:spPr>
           <a:xfrm>
-            <a:off x="8908084" y="5579668"/>
-            <a:ext cx="2647188" cy="658368"/>
+            <a:off x="10433304" y="4498848"/>
+            <a:ext cx="932688" cy="237744"/>
           </a:xfrm>
           <a:prstGeom prst="roundRect">
             <a:avLst>
-              <a:gd name="adj" fmla="val 8500"/>
+              <a:gd name="adj" fmla="val 50000"/>
             </a:avLst>
           </a:prstGeom>
           <a:solidFill>
-            <a:srgbClr val="E3DEDA"/>
+            <a:srgbClr val="FFFFFF"/>
           </a:solidFill>
-          <a:ln>
-            <a:noFill/>
+          <a:ln w="12700">
+            <a:solidFill>
+              <a:srgbClr val="1C1815"/>
+            </a:solidFill>
           </a:ln>
           <a:effectLst/>
         </p:spPr>
@@ -13351,62 +13083,56 @@
       </p:sp>
       <p:sp>
         <p:nvSpPr>
-          <p:cNvPr id="43" name="Rounded Rectangle 42"/>
-          <p:cNvSpPr/>
-          <p:nvPr/>
-        </p:nvSpPr>
-        <p:spPr>
-          <a:xfrm>
-            <a:off x="8878824" y="5541264"/>
-            <a:ext cx="2647188" cy="658368"/>
-          </a:xfrm>
-          <a:prstGeom prst="roundRect">
-            <a:avLst>
-              <a:gd name="adj" fmla="val 8500"/>
-            </a:avLst>
-          </a:prstGeom>
-          <a:solidFill>
-            <a:srgbClr val="F7F4F2"/>
-          </a:solidFill>
-          <a:ln w="12700">
-            <a:solidFill>
-              <a:srgbClr val="E7E1DC"/>
-            </a:solidFill>
-          </a:ln>
-          <a:effectLst/>
-        </p:spPr>
-        <p:style>
-          <a:lnRef idx="1">
-            <a:schemeClr val="accent1"/>
-          </a:lnRef>
-          <a:fillRef idx="3">
-            <a:schemeClr val="accent1"/>
-          </a:fillRef>
-          <a:effectRef idx="2">
-            <a:schemeClr val="accent1"/>
-          </a:effectRef>
-          <a:fontRef idx="minor">
-            <a:schemeClr val="lt1"/>
-          </a:fontRef>
-        </p:style>
-        <p:txBody>
-          <a:bodyPr rtlCol="0" anchor="ctr"/>
-          <a:lstStyle/>
-          <a:p>
-            <a:endParaRPr/>
-          </a:p>
-        </p:txBody>
-      </p:sp>
-      <p:sp>
-        <p:nvSpPr>
-          <p:cNvPr id="44" name="TextBox 43"/>
+          <p:cNvPr id="40" name="TextBox 39"/>
           <p:cNvSpPr txBox="1"/>
           <p:nvPr/>
         </p:nvSpPr>
         <p:spPr>
           <a:xfrm>
-            <a:off x="9079992" y="5632704"/>
-            <a:ext cx="2244852" cy="256032"/>
+            <a:off x="10433304" y="4498848"/>
+            <a:ext cx="932688" cy="237744"/>
+          </a:xfrm>
+          <a:prstGeom prst="rect">
+            <a:avLst/>
+          </a:prstGeom>
+          <a:noFill/>
+        </p:spPr>
+        <p:txBody>
+          <a:bodyPr wrap="square" lIns="0" tIns="0" rIns="0" bIns="0" anchor="ctr">
+            <a:spAutoFit/>
+          </a:bodyPr>
+          <a:lstStyle/>
+          <a:p>
+            <a:pPr algn="ctr">
+              <a:spcBef>
+                <a:spcPts val="0"/>
+              </a:spcBef>
+              <a:spcAft>
+                <a:spcPts val="0"/>
+              </a:spcAft>
+            </a:pPr>
+            <a:r>
+              <a:rPr sz="850" b="1" i="0">
+                <a:solidFill>
+                  <a:srgbClr val="1C1815"/>
+                </a:solidFill>
+                <a:latin typeface="Calibri"/>
+              </a:rPr>
+              <a:t>MEDIUM</a:t>
+            </a:r>
+          </a:p>
+        </p:txBody>
+      </p:sp>
+      <p:sp>
+        <p:nvSpPr>
+          <p:cNvPr id="41" name="TextBox 40"/>
+          <p:cNvSpPr txBox="1"/>
+          <p:nvPr/>
+        </p:nvSpPr>
+        <p:spPr>
+          <a:xfrm>
+            <a:off x="6446520" y="4828032"/>
+            <a:ext cx="4919472" cy="384048"/>
           </a:xfrm>
           <a:prstGeom prst="rect">
             <a:avLst/>
@@ -13420,6 +13146,9 @@
           <a:lstStyle/>
           <a:p>
             <a:pPr algn="l">
+              <a:lnSpc>
+                <a:spcPct val="116000"/>
+              </a:lnSpc>
               <a:spcBef>
                 <a:spcPts val="0"/>
               </a:spcBef>
@@ -13428,69 +13157,27 @@
               </a:spcAft>
             </a:pPr>
             <a:r>
-              <a:rPr sz="1500" b="1" i="0">
-                <a:solidFill>
-                  <a:srgbClr val="E1552B"/>
-                </a:solidFill>
-                <a:latin typeface="Calibri"/>
-              </a:rPr>
-              <a:t>91.4% → 97.1%</a:t>
-            </a:r>
-          </a:p>
-        </p:txBody>
-      </p:sp>
-      <p:sp>
-        <p:nvSpPr>
-          <p:cNvPr id="45" name="TextBox 44"/>
-          <p:cNvSpPr txBox="1"/>
-          <p:nvPr/>
-        </p:nvSpPr>
-        <p:spPr>
-          <a:xfrm>
-            <a:off x="9079992" y="5925312"/>
-            <a:ext cx="2244852" cy="219456"/>
-          </a:xfrm>
-          <a:prstGeom prst="rect">
-            <a:avLst/>
-          </a:prstGeom>
-          <a:noFill/>
-        </p:spPr>
-        <p:txBody>
-          <a:bodyPr wrap="square" lIns="0" tIns="0" rIns="0" bIns="0" anchor="t">
-            <a:spAutoFit/>
-          </a:bodyPr>
-          <a:lstStyle/>
-          <a:p>
-            <a:pPr algn="l">
-              <a:spcBef>
-                <a:spcPts val="0"/>
-              </a:spcBef>
-              <a:spcAft>
-                <a:spcPts val="0"/>
-              </a:spcAft>
-            </a:pPr>
-            <a:r>
-              <a:rPr sz="900" b="0" i="0">
+              <a:rPr sz="950" b="0" i="0">
                 <a:solidFill>
                   <a:srgbClr val="8B837C"/>
                 </a:solidFill>
                 <a:latin typeface="Calibri"/>
               </a:rPr>
-              <a:t>First-pass yield</a:t>
-            </a:r>
-          </a:p>
-        </p:txBody>
-      </p:sp>
-      <p:sp>
-        <p:nvSpPr>
-          <p:cNvPr id="46" name="Rectangle 45"/>
+              <a:t>AI-influenced quality decisions must be explainable, attributable and reversible under audit.</a:t>
+            </a:r>
+          </a:p>
+        </p:txBody>
+      </p:sp>
+      <p:sp>
+        <p:nvSpPr>
+          <p:cNvPr id="42" name="Rectangle 41"/>
           <p:cNvSpPr/>
           <p:nvPr/>
         </p:nvSpPr>
         <p:spPr>
           <a:xfrm>
-            <a:off x="566928" y="6272784"/>
-            <a:ext cx="11055096" cy="10972"/>
+            <a:off x="6446520" y="5266944"/>
+            <a:ext cx="4919472" cy="10972"/>
           </a:xfrm>
           <a:prstGeom prst="rect">
             <a:avLst/>
@@ -13527,14 +13214,14 @@
       </p:sp>
       <p:sp>
         <p:nvSpPr>
-          <p:cNvPr id="47" name="TextBox 46"/>
+          <p:cNvPr id="43" name="TextBox 42"/>
           <p:cNvSpPr txBox="1"/>
           <p:nvPr/>
         </p:nvSpPr>
         <p:spPr>
           <a:xfrm>
-            <a:off x="566928" y="6391656"/>
-            <a:ext cx="8229600" cy="310896"/>
+            <a:off x="6446520" y="5376672"/>
+            <a:ext cx="1280160" cy="182880"/>
           </a:xfrm>
           <a:prstGeom prst="rect">
             <a:avLst/>
@@ -13556,27 +13243,27 @@
               </a:spcAft>
             </a:pPr>
             <a:r>
-              <a:rPr sz="950" b="0" i="0">
-                <a:solidFill>
-                  <a:srgbClr val="948C85"/>
-                </a:solidFill>
-                <a:latin typeface="Calibri"/>
-              </a:rPr>
-              <a:t>Defect Sense  ·  Intelligent Manufacturing Quality Control</a:t>
-            </a:r>
-          </a:p>
-        </p:txBody>
-      </p:sp>
-      <p:sp>
-        <p:nvSpPr>
-          <p:cNvPr id="48" name="TextBox 47"/>
+              <a:rPr sz="900" b="1" i="0">
+                <a:solidFill>
+                  <a:srgbClr val="1C1815"/>
+                </a:solidFill>
+                <a:latin typeface="Calibri"/>
+              </a:rPr>
+              <a:t>MITIGATION</a:t>
+            </a:r>
+          </a:p>
+        </p:txBody>
+      </p:sp>
+      <p:sp>
+        <p:nvSpPr>
+          <p:cNvPr id="44" name="TextBox 43"/>
           <p:cNvSpPr txBox="1"/>
           <p:nvPr/>
         </p:nvSpPr>
         <p:spPr>
           <a:xfrm>
-            <a:off x="10058400" y="6391656"/>
-            <a:ext cx="1563624" cy="310896"/>
+            <a:off x="6446520" y="5577840"/>
+            <a:ext cx="4919472" cy="493776"/>
           </a:xfrm>
           <a:prstGeom prst="rect">
             <a:avLst/>
@@ -13589,6 +13276,137 @@
           </a:bodyPr>
           <a:lstStyle/>
           <a:p>
+            <a:pPr algn="l">
+              <a:lnSpc>
+                <a:spcPct val="116000"/>
+              </a:lnSpc>
+              <a:spcBef>
+                <a:spcPts val="0"/>
+              </a:spcBef>
+              <a:spcAft>
+                <a:spcPts val="0"/>
+              </a:spcAft>
+            </a:pPr>
+            <a:r>
+              <a:rPr sz="950" b="0" i="0">
+                <a:solidFill>
+                  <a:srgbClr val="3B3530"/>
+                </a:solidFill>
+                <a:latin typeface="Calibri"/>
+              </a:rPr>
+              <a:t>Provenance on every AI output. Full audit log with correlation IDs. Operator IDs tokenised. Autonomy ceiling in config and code: reject autonomously, never pass or halt without a human.</a:t>
+            </a:r>
+          </a:p>
+        </p:txBody>
+      </p:sp>
+      <p:sp>
+        <p:nvSpPr>
+          <p:cNvPr id="45" name="Rectangle 44"/>
+          <p:cNvSpPr/>
+          <p:nvPr/>
+        </p:nvSpPr>
+        <p:spPr>
+          <a:xfrm>
+            <a:off x="566928" y="6272784"/>
+            <a:ext cx="11055096" cy="10972"/>
+          </a:xfrm>
+          <a:prstGeom prst="rect">
+            <a:avLst/>
+          </a:prstGeom>
+          <a:solidFill>
+            <a:srgbClr val="E7E1DC"/>
+          </a:solidFill>
+          <a:ln>
+            <a:noFill/>
+          </a:ln>
+          <a:effectLst/>
+        </p:spPr>
+        <p:style>
+          <a:lnRef idx="1">
+            <a:schemeClr val="accent1"/>
+          </a:lnRef>
+          <a:fillRef idx="3">
+            <a:schemeClr val="accent1"/>
+          </a:fillRef>
+          <a:effectRef idx="2">
+            <a:schemeClr val="accent1"/>
+          </a:effectRef>
+          <a:fontRef idx="minor">
+            <a:schemeClr val="lt1"/>
+          </a:fontRef>
+        </p:style>
+        <p:txBody>
+          <a:bodyPr rtlCol="0" anchor="ctr"/>
+          <a:lstStyle/>
+          <a:p>
+            <a:endParaRPr/>
+          </a:p>
+        </p:txBody>
+      </p:sp>
+      <p:sp>
+        <p:nvSpPr>
+          <p:cNvPr id="46" name="TextBox 45"/>
+          <p:cNvSpPr txBox="1"/>
+          <p:nvPr/>
+        </p:nvSpPr>
+        <p:spPr>
+          <a:xfrm>
+            <a:off x="566928" y="6391656"/>
+            <a:ext cx="8229600" cy="310896"/>
+          </a:xfrm>
+          <a:prstGeom prst="rect">
+            <a:avLst/>
+          </a:prstGeom>
+          <a:noFill/>
+        </p:spPr>
+        <p:txBody>
+          <a:bodyPr wrap="square" lIns="0" tIns="0" rIns="0" bIns="0" anchor="t">
+            <a:spAutoFit/>
+          </a:bodyPr>
+          <a:lstStyle/>
+          <a:p>
+            <a:pPr algn="l">
+              <a:spcBef>
+                <a:spcPts val="0"/>
+              </a:spcBef>
+              <a:spcAft>
+                <a:spcPts val="0"/>
+              </a:spcAft>
+            </a:pPr>
+            <a:r>
+              <a:rPr sz="950" b="0" i="0">
+                <a:solidFill>
+                  <a:srgbClr val="948C85"/>
+                </a:solidFill>
+                <a:latin typeface="Calibri"/>
+              </a:rPr>
+              <a:t>Defect Sense  ·  Intelligent Manufacturing Quality Control</a:t>
+            </a:r>
+          </a:p>
+        </p:txBody>
+      </p:sp>
+      <p:sp>
+        <p:nvSpPr>
+          <p:cNvPr id="47" name="TextBox 46"/>
+          <p:cNvSpPr txBox="1"/>
+          <p:nvPr/>
+        </p:nvSpPr>
+        <p:spPr>
+          <a:xfrm>
+            <a:off x="10058400" y="6391656"/>
+            <a:ext cx="1563624" cy="310896"/>
+          </a:xfrm>
+          <a:prstGeom prst="rect">
+            <a:avLst/>
+          </a:prstGeom>
+          <a:noFill/>
+        </p:spPr>
+        <p:txBody>
+          <a:bodyPr wrap="square" lIns="0" tIns="0" rIns="0" bIns="0" anchor="t">
+            <a:spAutoFit/>
+          </a:bodyPr>
+          <a:lstStyle/>
+          <a:p>
             <a:pPr algn="r">
               <a:spcBef>
                 <a:spcPts val="0"/>
@@ -13604,7 +13422,7 @@
                 </a:solidFill>
                 <a:latin typeface="Calibri"/>
               </a:rPr>
-              <a:t>12 / 14</a:t>
+              <a:t>13 / 14</a:t>
             </a:r>
           </a:p>
         </p:txBody>
@@ -13807,2078 +13625,6 @@
                 </a:solidFill>
                 <a:latin typeface="Calibri"/>
               </a:rPr>
-              <a:t>GOVERNANCE</a:t>
-            </a:r>
-          </a:p>
-        </p:txBody>
-      </p:sp>
-      <p:sp>
-        <p:nvSpPr>
-          <p:cNvPr id="6" name="TextBox 5"/>
-          <p:cNvSpPr txBox="1"/>
-          <p:nvPr/>
-        </p:nvSpPr>
-        <p:spPr>
-          <a:xfrm>
-            <a:off x="566928" y="640080"/>
-            <a:ext cx="11055096" cy="566928"/>
-          </a:xfrm>
-          <a:prstGeom prst="rect">
-            <a:avLst/>
-          </a:prstGeom>
-          <a:noFill/>
-        </p:spPr>
-        <p:txBody>
-          <a:bodyPr wrap="square" lIns="0" tIns="0" rIns="0" bIns="0" anchor="t">
-            <a:spAutoFit/>
-          </a:bodyPr>
-          <a:lstStyle/>
-          <a:p>
-            <a:pPr algn="l">
-              <a:lnSpc>
-                <a:spcPct val="100000"/>
-              </a:lnSpc>
-              <a:spcBef>
-                <a:spcPts val="0"/>
-              </a:spcBef>
-              <a:spcAft>
-                <a:spcPts val="0"/>
-              </a:spcAft>
-            </a:pPr>
-            <a:r>
-              <a:rPr sz="3000" b="1" i="0">
-                <a:solidFill>
-                  <a:srgbClr val="15120F"/>
-                </a:solidFill>
-                <a:latin typeface="Calibri"/>
-              </a:rPr>
-              <a:t>RISKS AND HOW WE MITIGATE THEM</a:t>
-            </a:r>
-          </a:p>
-        </p:txBody>
-      </p:sp>
-      <p:sp>
-        <p:nvSpPr>
-          <p:cNvPr id="7" name="Rounded Rectangle 6"/>
-          <p:cNvSpPr/>
-          <p:nvPr/>
-        </p:nvSpPr>
-        <p:spPr>
-          <a:xfrm>
-            <a:off x="566928" y="1298448"/>
-            <a:ext cx="713232" cy="50292"/>
-          </a:xfrm>
-          <a:prstGeom prst="roundRect">
-            <a:avLst>
-              <a:gd name="adj" fmla="val 50000"/>
-            </a:avLst>
-          </a:prstGeom>
-          <a:solidFill>
-            <a:srgbClr val="E1552B"/>
-          </a:solidFill>
-          <a:ln>
-            <a:noFill/>
-          </a:ln>
-          <a:effectLst/>
-        </p:spPr>
-        <p:style>
-          <a:lnRef idx="1">
-            <a:schemeClr val="accent1"/>
-          </a:lnRef>
-          <a:fillRef idx="3">
-            <a:schemeClr val="accent1"/>
-          </a:fillRef>
-          <a:effectRef idx="2">
-            <a:schemeClr val="accent1"/>
-          </a:effectRef>
-          <a:fontRef idx="minor">
-            <a:schemeClr val="lt1"/>
-          </a:fontRef>
-        </p:style>
-        <p:txBody>
-          <a:bodyPr rtlCol="0" anchor="ctr"/>
-          <a:lstStyle/>
-          <a:p>
-            <a:endParaRPr/>
-          </a:p>
-        </p:txBody>
-      </p:sp>
-      <p:sp>
-        <p:nvSpPr>
-          <p:cNvPr id="8" name="TextBox 7"/>
-          <p:cNvSpPr txBox="1"/>
-          <p:nvPr/>
-        </p:nvSpPr>
-        <p:spPr>
-          <a:xfrm>
-            <a:off x="566928" y="1481328"/>
-            <a:ext cx="10241280" cy="274320"/>
-          </a:xfrm>
-          <a:prstGeom prst="rect">
-            <a:avLst/>
-          </a:prstGeom>
-          <a:noFill/>
-        </p:spPr>
-        <p:txBody>
-          <a:bodyPr wrap="square" lIns="0" tIns="0" rIns="0" bIns="0" anchor="t">
-            <a:spAutoFit/>
-          </a:bodyPr>
-          <a:lstStyle/>
-          <a:p>
-            <a:pPr algn="l">
-              <a:spcBef>
-                <a:spcPts val="0"/>
-              </a:spcBef>
-              <a:spcAft>
-                <a:spcPts val="0"/>
-              </a:spcAft>
-            </a:pPr>
-            <a:r>
-              <a:rPr sz="1350" b="0" i="0">
-                <a:solidFill>
-                  <a:srgbClr val="8B837C"/>
-                </a:solidFill>
-                <a:latin typeface="Calibri"/>
-              </a:rPr>
-              <a:t>Each risk has a named control that is already implemented, not a promise</a:t>
-            </a:r>
-          </a:p>
-        </p:txBody>
-      </p:sp>
-      <p:sp>
-        <p:nvSpPr>
-          <p:cNvPr id="9" name="Rounded Rectangle 8"/>
-          <p:cNvSpPr/>
-          <p:nvPr/>
-        </p:nvSpPr>
-        <p:spPr>
-          <a:xfrm>
-            <a:off x="596188" y="2269540"/>
-            <a:ext cx="5431536" cy="1883664"/>
-          </a:xfrm>
-          <a:prstGeom prst="roundRect">
-            <a:avLst>
-              <a:gd name="adj" fmla="val 8500"/>
-            </a:avLst>
-          </a:prstGeom>
-          <a:solidFill>
-            <a:srgbClr val="E3DEDA"/>
-          </a:solidFill>
-          <a:ln>
-            <a:noFill/>
-          </a:ln>
-          <a:effectLst/>
-        </p:spPr>
-        <p:style>
-          <a:lnRef idx="1">
-            <a:schemeClr val="accent1"/>
-          </a:lnRef>
-          <a:fillRef idx="3">
-            <a:schemeClr val="accent1"/>
-          </a:fillRef>
-          <a:effectRef idx="2">
-            <a:schemeClr val="accent1"/>
-          </a:effectRef>
-          <a:fontRef idx="minor">
-            <a:schemeClr val="lt1"/>
-          </a:fontRef>
-        </p:style>
-        <p:txBody>
-          <a:bodyPr rtlCol="0" anchor="ctr"/>
-          <a:lstStyle/>
-          <a:p>
-            <a:endParaRPr/>
-          </a:p>
-        </p:txBody>
-      </p:sp>
-      <p:sp>
-        <p:nvSpPr>
-          <p:cNvPr id="10" name="Rounded Rectangle 9"/>
-          <p:cNvSpPr/>
-          <p:nvPr/>
-        </p:nvSpPr>
-        <p:spPr>
-          <a:xfrm>
-            <a:off x="566928" y="2231136"/>
-            <a:ext cx="5431536" cy="1883664"/>
-          </a:xfrm>
-          <a:prstGeom prst="roundRect">
-            <a:avLst>
-              <a:gd name="adj" fmla="val 8500"/>
-            </a:avLst>
-          </a:prstGeom>
-          <a:solidFill>
-            <a:srgbClr val="FFFFFF"/>
-          </a:solidFill>
-          <a:ln w="12700">
-            <a:solidFill>
-              <a:srgbClr val="E7E1DC"/>
-            </a:solidFill>
-          </a:ln>
-          <a:effectLst/>
-        </p:spPr>
-        <p:style>
-          <a:lnRef idx="1">
-            <a:schemeClr val="accent1"/>
-          </a:lnRef>
-          <a:fillRef idx="3">
-            <a:schemeClr val="accent1"/>
-          </a:fillRef>
-          <a:effectRef idx="2">
-            <a:schemeClr val="accent1"/>
-          </a:effectRef>
-          <a:fontRef idx="minor">
-            <a:schemeClr val="lt1"/>
-          </a:fontRef>
-        </p:style>
-        <p:txBody>
-          <a:bodyPr rtlCol="0" anchor="ctr"/>
-          <a:lstStyle/>
-          <a:p>
-            <a:endParaRPr/>
-          </a:p>
-        </p:txBody>
-      </p:sp>
-      <p:sp>
-        <p:nvSpPr>
-          <p:cNvPr id="11" name="TextBox 10"/>
-          <p:cNvSpPr txBox="1"/>
-          <p:nvPr/>
-        </p:nvSpPr>
-        <p:spPr>
-          <a:xfrm>
-            <a:off x="822960" y="2432304"/>
-            <a:ext cx="3566160" cy="237744"/>
-          </a:xfrm>
-          <a:prstGeom prst="rect">
-            <a:avLst/>
-          </a:prstGeom>
-          <a:noFill/>
-        </p:spPr>
-        <p:txBody>
-          <a:bodyPr wrap="square" lIns="0" tIns="0" rIns="0" bIns="0" anchor="t">
-            <a:spAutoFit/>
-          </a:bodyPr>
-          <a:lstStyle/>
-          <a:p>
-            <a:pPr algn="l">
-              <a:spcBef>
-                <a:spcPts val="0"/>
-              </a:spcBef>
-              <a:spcAft>
-                <a:spcPts val="0"/>
-              </a:spcAft>
-            </a:pPr>
-            <a:r>
-              <a:rPr sz="1250" b="1" i="0">
-                <a:solidFill>
-                  <a:srgbClr val="15120F"/>
-                </a:solidFill>
-                <a:latin typeface="Calibri"/>
-              </a:rPr>
-              <a:t>DATA QUALITY</a:t>
-            </a:r>
-          </a:p>
-        </p:txBody>
-      </p:sp>
-      <p:sp>
-        <p:nvSpPr>
-          <p:cNvPr id="12" name="Rounded Rectangle 11"/>
-          <p:cNvSpPr/>
-          <p:nvPr/>
-        </p:nvSpPr>
-        <p:spPr>
-          <a:xfrm>
-            <a:off x="4809744" y="2432304"/>
-            <a:ext cx="932688" cy="237744"/>
-          </a:xfrm>
-          <a:prstGeom prst="roundRect">
-            <a:avLst>
-              <a:gd name="adj" fmla="val 50000"/>
-            </a:avLst>
-          </a:prstGeom>
-          <a:solidFill>
-            <a:srgbClr val="FFFFFF"/>
-          </a:solidFill>
-          <a:ln w="12700">
-            <a:solidFill>
-              <a:srgbClr val="E1552B"/>
-            </a:solidFill>
-          </a:ln>
-          <a:effectLst/>
-        </p:spPr>
-        <p:style>
-          <a:lnRef idx="1">
-            <a:schemeClr val="accent1"/>
-          </a:lnRef>
-          <a:fillRef idx="3">
-            <a:schemeClr val="accent1"/>
-          </a:fillRef>
-          <a:effectRef idx="2">
-            <a:schemeClr val="accent1"/>
-          </a:effectRef>
-          <a:fontRef idx="minor">
-            <a:schemeClr val="lt1"/>
-          </a:fontRef>
-        </p:style>
-        <p:txBody>
-          <a:bodyPr rtlCol="0" anchor="ctr"/>
-          <a:lstStyle/>
-          <a:p>
-            <a:endParaRPr/>
-          </a:p>
-        </p:txBody>
-      </p:sp>
-      <p:sp>
-        <p:nvSpPr>
-          <p:cNvPr id="13" name="TextBox 12"/>
-          <p:cNvSpPr txBox="1"/>
-          <p:nvPr/>
-        </p:nvSpPr>
-        <p:spPr>
-          <a:xfrm>
-            <a:off x="4809744" y="2432304"/>
-            <a:ext cx="932688" cy="237744"/>
-          </a:xfrm>
-          <a:prstGeom prst="rect">
-            <a:avLst/>
-          </a:prstGeom>
-          <a:noFill/>
-        </p:spPr>
-        <p:txBody>
-          <a:bodyPr wrap="square" lIns="0" tIns="0" rIns="0" bIns="0" anchor="ctr">
-            <a:spAutoFit/>
-          </a:bodyPr>
-          <a:lstStyle/>
-          <a:p>
-            <a:pPr algn="ctr">
-              <a:spcBef>
-                <a:spcPts val="0"/>
-              </a:spcBef>
-              <a:spcAft>
-                <a:spcPts val="0"/>
-              </a:spcAft>
-            </a:pPr>
-            <a:r>
-              <a:rPr sz="850" b="1" i="0">
-                <a:solidFill>
-                  <a:srgbClr val="E1552B"/>
-                </a:solidFill>
-                <a:latin typeface="Calibri"/>
-              </a:rPr>
-              <a:t>HIGH</a:t>
-            </a:r>
-          </a:p>
-        </p:txBody>
-      </p:sp>
-      <p:sp>
-        <p:nvSpPr>
-          <p:cNvPr id="14" name="TextBox 13"/>
-          <p:cNvSpPr txBox="1"/>
-          <p:nvPr/>
-        </p:nvSpPr>
-        <p:spPr>
-          <a:xfrm>
-            <a:off x="822960" y="2761488"/>
-            <a:ext cx="4919472" cy="384048"/>
-          </a:xfrm>
-          <a:prstGeom prst="rect">
-            <a:avLst/>
-          </a:prstGeom>
-          <a:noFill/>
-        </p:spPr>
-        <p:txBody>
-          <a:bodyPr wrap="square" lIns="0" tIns="0" rIns="0" bIns="0" anchor="t">
-            <a:spAutoFit/>
-          </a:bodyPr>
-          <a:lstStyle/>
-          <a:p>
-            <a:pPr algn="l">
-              <a:lnSpc>
-                <a:spcPct val="116000"/>
-              </a:lnSpc>
-              <a:spcBef>
-                <a:spcPts val="0"/>
-              </a:spcBef>
-              <a:spcAft>
-                <a:spcPts val="0"/>
-              </a:spcAft>
-            </a:pPr>
-            <a:r>
-              <a:rPr sz="950" b="0" i="0">
-                <a:solidFill>
-                  <a:srgbClr val="8B837C"/>
-                </a:solidFill>
-                <a:latin typeface="Calibri"/>
-              </a:rPr>
-              <a:t>Sensor drift, stuck-at values, clock skew and blown exposure silently corrupt any model downstream.</a:t>
-            </a:r>
-          </a:p>
-        </p:txBody>
-      </p:sp>
-      <p:sp>
-        <p:nvSpPr>
-          <p:cNvPr id="15" name="Rectangle 14"/>
-          <p:cNvSpPr/>
-          <p:nvPr/>
-        </p:nvSpPr>
-        <p:spPr>
-          <a:xfrm>
-            <a:off x="822960" y="3200400"/>
-            <a:ext cx="4919472" cy="10972"/>
-          </a:xfrm>
-          <a:prstGeom prst="rect">
-            <a:avLst/>
-          </a:prstGeom>
-          <a:solidFill>
-            <a:srgbClr val="E7E1DC"/>
-          </a:solidFill>
-          <a:ln>
-            <a:noFill/>
-          </a:ln>
-          <a:effectLst/>
-        </p:spPr>
-        <p:style>
-          <a:lnRef idx="1">
-            <a:schemeClr val="accent1"/>
-          </a:lnRef>
-          <a:fillRef idx="3">
-            <a:schemeClr val="accent1"/>
-          </a:fillRef>
-          <a:effectRef idx="2">
-            <a:schemeClr val="accent1"/>
-          </a:effectRef>
-          <a:fontRef idx="minor">
-            <a:schemeClr val="lt1"/>
-          </a:fontRef>
-        </p:style>
-        <p:txBody>
-          <a:bodyPr rtlCol="0" anchor="ctr"/>
-          <a:lstStyle/>
-          <a:p>
-            <a:endParaRPr/>
-          </a:p>
-        </p:txBody>
-      </p:sp>
-      <p:sp>
-        <p:nvSpPr>
-          <p:cNvPr id="16" name="TextBox 15"/>
-          <p:cNvSpPr txBox="1"/>
-          <p:nvPr/>
-        </p:nvSpPr>
-        <p:spPr>
-          <a:xfrm>
-            <a:off x="822960" y="3310128"/>
-            <a:ext cx="1280160" cy="182880"/>
-          </a:xfrm>
-          <a:prstGeom prst="rect">
-            <a:avLst/>
-          </a:prstGeom>
-          <a:noFill/>
-        </p:spPr>
-        <p:txBody>
-          <a:bodyPr wrap="square" lIns="0" tIns="0" rIns="0" bIns="0" anchor="t">
-            <a:spAutoFit/>
-          </a:bodyPr>
-          <a:lstStyle/>
-          <a:p>
-            <a:pPr algn="l">
-              <a:spcBef>
-                <a:spcPts val="0"/>
-              </a:spcBef>
-              <a:spcAft>
-                <a:spcPts val="0"/>
-              </a:spcAft>
-            </a:pPr>
-            <a:r>
-              <a:rPr sz="900" b="1" i="0">
-                <a:solidFill>
-                  <a:srgbClr val="1C1815"/>
-                </a:solidFill>
-                <a:latin typeface="Calibri"/>
-              </a:rPr>
-              <a:t>MITIGATION</a:t>
-            </a:r>
-          </a:p>
-        </p:txBody>
-      </p:sp>
-      <p:sp>
-        <p:nvSpPr>
-          <p:cNvPr id="17" name="TextBox 16"/>
-          <p:cNvSpPr txBox="1"/>
-          <p:nvPr/>
-        </p:nvSpPr>
-        <p:spPr>
-          <a:xfrm>
-            <a:off x="822960" y="3511296"/>
-            <a:ext cx="4919472" cy="493776"/>
-          </a:xfrm>
-          <a:prstGeom prst="rect">
-            <a:avLst/>
-          </a:prstGeom>
-          <a:noFill/>
-        </p:spPr>
-        <p:txBody>
-          <a:bodyPr wrap="square" lIns="0" tIns="0" rIns="0" bIns="0" anchor="t">
-            <a:spAutoFit/>
-          </a:bodyPr>
-          <a:lstStyle/>
-          <a:p>
-            <a:pPr algn="l">
-              <a:lnSpc>
-                <a:spcPct val="116000"/>
-              </a:lnSpc>
-              <a:spcBef>
-                <a:spcPts val="0"/>
-              </a:spcBef>
-              <a:spcAft>
-                <a:spcPts val="0"/>
-              </a:spcAft>
-            </a:pPr>
-            <a:r>
-              <a:rPr sz="950" b="0" i="0">
-                <a:solidFill>
-                  <a:srgbClr val="3B3530"/>
-                </a:solidFill>
-                <a:latin typeface="Calibri"/>
-              </a:rPr>
-              <a:t>Data-quality gate rejects ~3% of records and the rejection log is shown in-product. Dirty data is injected deliberately in test. Stuck-at and range detection run per signal.</a:t>
-            </a:r>
-          </a:p>
-        </p:txBody>
-      </p:sp>
-      <p:sp>
-        <p:nvSpPr>
-          <p:cNvPr id="18" name="Rounded Rectangle 17"/>
-          <p:cNvSpPr/>
-          <p:nvPr/>
-        </p:nvSpPr>
-        <p:spPr>
-          <a:xfrm>
-            <a:off x="6219748" y="2269540"/>
-            <a:ext cx="5431536" cy="1883664"/>
-          </a:xfrm>
-          <a:prstGeom prst="roundRect">
-            <a:avLst>
-              <a:gd name="adj" fmla="val 8500"/>
-            </a:avLst>
-          </a:prstGeom>
-          <a:solidFill>
-            <a:srgbClr val="E3DEDA"/>
-          </a:solidFill>
-          <a:ln>
-            <a:noFill/>
-          </a:ln>
-          <a:effectLst/>
-        </p:spPr>
-        <p:style>
-          <a:lnRef idx="1">
-            <a:schemeClr val="accent1"/>
-          </a:lnRef>
-          <a:fillRef idx="3">
-            <a:schemeClr val="accent1"/>
-          </a:fillRef>
-          <a:effectRef idx="2">
-            <a:schemeClr val="accent1"/>
-          </a:effectRef>
-          <a:fontRef idx="minor">
-            <a:schemeClr val="lt1"/>
-          </a:fontRef>
-        </p:style>
-        <p:txBody>
-          <a:bodyPr rtlCol="0" anchor="ctr"/>
-          <a:lstStyle/>
-          <a:p>
-            <a:endParaRPr/>
-          </a:p>
-        </p:txBody>
-      </p:sp>
-      <p:sp>
-        <p:nvSpPr>
-          <p:cNvPr id="19" name="Rounded Rectangle 18"/>
-          <p:cNvSpPr/>
-          <p:nvPr/>
-        </p:nvSpPr>
-        <p:spPr>
-          <a:xfrm>
-            <a:off x="6190488" y="2231136"/>
-            <a:ext cx="5431536" cy="1883664"/>
-          </a:xfrm>
-          <a:prstGeom prst="roundRect">
-            <a:avLst>
-              <a:gd name="adj" fmla="val 8500"/>
-            </a:avLst>
-          </a:prstGeom>
-          <a:solidFill>
-            <a:srgbClr val="FFFFFF"/>
-          </a:solidFill>
-          <a:ln w="12700">
-            <a:solidFill>
-              <a:srgbClr val="E7E1DC"/>
-            </a:solidFill>
-          </a:ln>
-          <a:effectLst/>
-        </p:spPr>
-        <p:style>
-          <a:lnRef idx="1">
-            <a:schemeClr val="accent1"/>
-          </a:lnRef>
-          <a:fillRef idx="3">
-            <a:schemeClr val="accent1"/>
-          </a:fillRef>
-          <a:effectRef idx="2">
-            <a:schemeClr val="accent1"/>
-          </a:effectRef>
-          <a:fontRef idx="minor">
-            <a:schemeClr val="lt1"/>
-          </a:fontRef>
-        </p:style>
-        <p:txBody>
-          <a:bodyPr rtlCol="0" anchor="ctr"/>
-          <a:lstStyle/>
-          <a:p>
-            <a:endParaRPr/>
-          </a:p>
-        </p:txBody>
-      </p:sp>
-      <p:sp>
-        <p:nvSpPr>
-          <p:cNvPr id="20" name="TextBox 19"/>
-          <p:cNvSpPr txBox="1"/>
-          <p:nvPr/>
-        </p:nvSpPr>
-        <p:spPr>
-          <a:xfrm>
-            <a:off x="6446520" y="2432304"/>
-            <a:ext cx="3566160" cy="237744"/>
-          </a:xfrm>
-          <a:prstGeom prst="rect">
-            <a:avLst/>
-          </a:prstGeom>
-          <a:noFill/>
-        </p:spPr>
-        <p:txBody>
-          <a:bodyPr wrap="square" lIns="0" tIns="0" rIns="0" bIns="0" anchor="t">
-            <a:spAutoFit/>
-          </a:bodyPr>
-          <a:lstStyle/>
-          <a:p>
-            <a:pPr algn="l">
-              <a:spcBef>
-                <a:spcPts val="0"/>
-              </a:spcBef>
-              <a:spcAft>
-                <a:spcPts val="0"/>
-              </a:spcAft>
-            </a:pPr>
-            <a:r>
-              <a:rPr sz="1250" b="1" i="0">
-                <a:solidFill>
-                  <a:srgbClr val="15120F"/>
-                </a:solidFill>
-                <a:latin typeface="Calibri"/>
-              </a:rPr>
-              <a:t>USER ADOPTION</a:t>
-            </a:r>
-          </a:p>
-        </p:txBody>
-      </p:sp>
-      <p:sp>
-        <p:nvSpPr>
-          <p:cNvPr id="21" name="Rounded Rectangle 20"/>
-          <p:cNvSpPr/>
-          <p:nvPr/>
-        </p:nvSpPr>
-        <p:spPr>
-          <a:xfrm>
-            <a:off x="10433304" y="2432304"/>
-            <a:ext cx="932688" cy="237744"/>
-          </a:xfrm>
-          <a:prstGeom prst="roundRect">
-            <a:avLst>
-              <a:gd name="adj" fmla="val 50000"/>
-            </a:avLst>
-          </a:prstGeom>
-          <a:solidFill>
-            <a:srgbClr val="FFFFFF"/>
-          </a:solidFill>
-          <a:ln w="12700">
-            <a:solidFill>
-              <a:srgbClr val="E1552B"/>
-            </a:solidFill>
-          </a:ln>
-          <a:effectLst/>
-        </p:spPr>
-        <p:style>
-          <a:lnRef idx="1">
-            <a:schemeClr val="accent1"/>
-          </a:lnRef>
-          <a:fillRef idx="3">
-            <a:schemeClr val="accent1"/>
-          </a:fillRef>
-          <a:effectRef idx="2">
-            <a:schemeClr val="accent1"/>
-          </a:effectRef>
-          <a:fontRef idx="minor">
-            <a:schemeClr val="lt1"/>
-          </a:fontRef>
-        </p:style>
-        <p:txBody>
-          <a:bodyPr rtlCol="0" anchor="ctr"/>
-          <a:lstStyle/>
-          <a:p>
-            <a:endParaRPr/>
-          </a:p>
-        </p:txBody>
-      </p:sp>
-      <p:sp>
-        <p:nvSpPr>
-          <p:cNvPr id="22" name="TextBox 21"/>
-          <p:cNvSpPr txBox="1"/>
-          <p:nvPr/>
-        </p:nvSpPr>
-        <p:spPr>
-          <a:xfrm>
-            <a:off x="10433304" y="2432304"/>
-            <a:ext cx="932688" cy="237744"/>
-          </a:xfrm>
-          <a:prstGeom prst="rect">
-            <a:avLst/>
-          </a:prstGeom>
-          <a:noFill/>
-        </p:spPr>
-        <p:txBody>
-          <a:bodyPr wrap="square" lIns="0" tIns="0" rIns="0" bIns="0" anchor="ctr">
-            <a:spAutoFit/>
-          </a:bodyPr>
-          <a:lstStyle/>
-          <a:p>
-            <a:pPr algn="ctr">
-              <a:spcBef>
-                <a:spcPts val="0"/>
-              </a:spcBef>
-              <a:spcAft>
-                <a:spcPts val="0"/>
-              </a:spcAft>
-            </a:pPr>
-            <a:r>
-              <a:rPr sz="850" b="1" i="0">
-                <a:solidFill>
-                  <a:srgbClr val="E1552B"/>
-                </a:solidFill>
-                <a:latin typeface="Calibri"/>
-              </a:rPr>
-              <a:t>HIGH</a:t>
-            </a:r>
-          </a:p>
-        </p:txBody>
-      </p:sp>
-      <p:sp>
-        <p:nvSpPr>
-          <p:cNvPr id="23" name="TextBox 22"/>
-          <p:cNvSpPr txBox="1"/>
-          <p:nvPr/>
-        </p:nvSpPr>
-        <p:spPr>
-          <a:xfrm>
-            <a:off x="6446520" y="2761488"/>
-            <a:ext cx="4919472" cy="384048"/>
-          </a:xfrm>
-          <a:prstGeom prst="rect">
-            <a:avLst/>
-          </a:prstGeom>
-          <a:noFill/>
-        </p:spPr>
-        <p:txBody>
-          <a:bodyPr wrap="square" lIns="0" tIns="0" rIns="0" bIns="0" anchor="t">
-            <a:spAutoFit/>
-          </a:bodyPr>
-          <a:lstStyle/>
-          <a:p>
-            <a:pPr algn="l">
-              <a:lnSpc>
-                <a:spcPct val="116000"/>
-              </a:lnSpc>
-              <a:spcBef>
-                <a:spcPts val="0"/>
-              </a:spcBef>
-              <a:spcAft>
-                <a:spcPts val="0"/>
-              </a:spcAft>
-            </a:pPr>
-            <a:r>
-              <a:rPr sz="950" b="0" i="0">
-                <a:solidFill>
-                  <a:srgbClr val="8B837C"/>
-                </a:solidFill>
-                <a:latin typeface="Calibri"/>
-              </a:rPr>
-              <a:t>Operators switch off an inspector that cries wolf, and then there is no inspector at all.</a:t>
-            </a:r>
-          </a:p>
-        </p:txBody>
-      </p:sp>
-      <p:sp>
-        <p:nvSpPr>
-          <p:cNvPr id="24" name="Rectangle 23"/>
-          <p:cNvSpPr/>
-          <p:nvPr/>
-        </p:nvSpPr>
-        <p:spPr>
-          <a:xfrm>
-            <a:off x="6446520" y="3200400"/>
-            <a:ext cx="4919472" cy="10972"/>
-          </a:xfrm>
-          <a:prstGeom prst="rect">
-            <a:avLst/>
-          </a:prstGeom>
-          <a:solidFill>
-            <a:srgbClr val="E7E1DC"/>
-          </a:solidFill>
-          <a:ln>
-            <a:noFill/>
-          </a:ln>
-          <a:effectLst/>
-        </p:spPr>
-        <p:style>
-          <a:lnRef idx="1">
-            <a:schemeClr val="accent1"/>
-          </a:lnRef>
-          <a:fillRef idx="3">
-            <a:schemeClr val="accent1"/>
-          </a:fillRef>
-          <a:effectRef idx="2">
-            <a:schemeClr val="accent1"/>
-          </a:effectRef>
-          <a:fontRef idx="minor">
-            <a:schemeClr val="lt1"/>
-          </a:fontRef>
-        </p:style>
-        <p:txBody>
-          <a:bodyPr rtlCol="0" anchor="ctr"/>
-          <a:lstStyle/>
-          <a:p>
-            <a:endParaRPr/>
-          </a:p>
-        </p:txBody>
-      </p:sp>
-      <p:sp>
-        <p:nvSpPr>
-          <p:cNvPr id="25" name="TextBox 24"/>
-          <p:cNvSpPr txBox="1"/>
-          <p:nvPr/>
-        </p:nvSpPr>
-        <p:spPr>
-          <a:xfrm>
-            <a:off x="6446520" y="3310128"/>
-            <a:ext cx="1280160" cy="182880"/>
-          </a:xfrm>
-          <a:prstGeom prst="rect">
-            <a:avLst/>
-          </a:prstGeom>
-          <a:noFill/>
-        </p:spPr>
-        <p:txBody>
-          <a:bodyPr wrap="square" lIns="0" tIns="0" rIns="0" bIns="0" anchor="t">
-            <a:spAutoFit/>
-          </a:bodyPr>
-          <a:lstStyle/>
-          <a:p>
-            <a:pPr algn="l">
-              <a:spcBef>
-                <a:spcPts val="0"/>
-              </a:spcBef>
-              <a:spcAft>
-                <a:spcPts val="0"/>
-              </a:spcAft>
-            </a:pPr>
-            <a:r>
-              <a:rPr sz="900" b="1" i="0">
-                <a:solidFill>
-                  <a:srgbClr val="1C1815"/>
-                </a:solidFill>
-                <a:latin typeface="Calibri"/>
-              </a:rPr>
-              <a:t>MITIGATION</a:t>
-            </a:r>
-          </a:p>
-        </p:txBody>
-      </p:sp>
-      <p:sp>
-        <p:nvSpPr>
-          <p:cNvPr id="26" name="TextBox 25"/>
-          <p:cNvSpPr txBox="1"/>
-          <p:nvPr/>
-        </p:nvSpPr>
-        <p:spPr>
-          <a:xfrm>
-            <a:off x="6446520" y="3511296"/>
-            <a:ext cx="4919472" cy="493776"/>
-          </a:xfrm>
-          <a:prstGeom prst="rect">
-            <a:avLst/>
-          </a:prstGeom>
-          <a:noFill/>
-        </p:spPr>
-        <p:txBody>
-          <a:bodyPr wrap="square" lIns="0" tIns="0" rIns="0" bIns="0" anchor="t">
-            <a:spAutoFit/>
-          </a:bodyPr>
-          <a:lstStyle/>
-          <a:p>
-            <a:pPr algn="l">
-              <a:lnSpc>
-                <a:spcPct val="116000"/>
-              </a:lnSpc>
-              <a:spcBef>
-                <a:spcPts val="0"/>
-              </a:spcBef>
-              <a:spcAft>
-                <a:spcPts val="0"/>
-              </a:spcAft>
-            </a:pPr>
-            <a:r>
-              <a:rPr sz="950" b="0" i="0">
-                <a:solidFill>
-                  <a:srgbClr val="3B3530"/>
-                </a:solidFill>
-                <a:latin typeface="Calibri"/>
-              </a:rPr>
-              <a:t>False positives held at ≤2% on clean runs. Role-aware explanation depth. Operator feedback visibly changes thresholds, so correcting the system is worth the operator's time.</a:t>
-            </a:r>
-          </a:p>
-        </p:txBody>
-      </p:sp>
-      <p:sp>
-        <p:nvSpPr>
-          <p:cNvPr id="27" name="Rounded Rectangle 26"/>
-          <p:cNvSpPr/>
-          <p:nvPr/>
-        </p:nvSpPr>
-        <p:spPr>
-          <a:xfrm>
-            <a:off x="596188" y="4336084"/>
-            <a:ext cx="5431536" cy="1883664"/>
-          </a:xfrm>
-          <a:prstGeom prst="roundRect">
-            <a:avLst>
-              <a:gd name="adj" fmla="val 8500"/>
-            </a:avLst>
-          </a:prstGeom>
-          <a:solidFill>
-            <a:srgbClr val="E3DEDA"/>
-          </a:solidFill>
-          <a:ln>
-            <a:noFill/>
-          </a:ln>
-          <a:effectLst/>
-        </p:spPr>
-        <p:style>
-          <a:lnRef idx="1">
-            <a:schemeClr val="accent1"/>
-          </a:lnRef>
-          <a:fillRef idx="3">
-            <a:schemeClr val="accent1"/>
-          </a:fillRef>
-          <a:effectRef idx="2">
-            <a:schemeClr val="accent1"/>
-          </a:effectRef>
-          <a:fontRef idx="minor">
-            <a:schemeClr val="lt1"/>
-          </a:fontRef>
-        </p:style>
-        <p:txBody>
-          <a:bodyPr rtlCol="0" anchor="ctr"/>
-          <a:lstStyle/>
-          <a:p>
-            <a:endParaRPr/>
-          </a:p>
-        </p:txBody>
-      </p:sp>
-      <p:sp>
-        <p:nvSpPr>
-          <p:cNvPr id="28" name="Rounded Rectangle 27"/>
-          <p:cNvSpPr/>
-          <p:nvPr/>
-        </p:nvSpPr>
-        <p:spPr>
-          <a:xfrm>
-            <a:off x="566928" y="4297680"/>
-            <a:ext cx="5431536" cy="1883664"/>
-          </a:xfrm>
-          <a:prstGeom prst="roundRect">
-            <a:avLst>
-              <a:gd name="adj" fmla="val 8500"/>
-            </a:avLst>
-          </a:prstGeom>
-          <a:solidFill>
-            <a:srgbClr val="FFFFFF"/>
-          </a:solidFill>
-          <a:ln w="12700">
-            <a:solidFill>
-              <a:srgbClr val="E7E1DC"/>
-            </a:solidFill>
-          </a:ln>
-          <a:effectLst/>
-        </p:spPr>
-        <p:style>
-          <a:lnRef idx="1">
-            <a:schemeClr val="accent1"/>
-          </a:lnRef>
-          <a:fillRef idx="3">
-            <a:schemeClr val="accent1"/>
-          </a:fillRef>
-          <a:effectRef idx="2">
-            <a:schemeClr val="accent1"/>
-          </a:effectRef>
-          <a:fontRef idx="minor">
-            <a:schemeClr val="lt1"/>
-          </a:fontRef>
-        </p:style>
-        <p:txBody>
-          <a:bodyPr rtlCol="0" anchor="ctr"/>
-          <a:lstStyle/>
-          <a:p>
-            <a:endParaRPr/>
-          </a:p>
-        </p:txBody>
-      </p:sp>
-      <p:sp>
-        <p:nvSpPr>
-          <p:cNvPr id="29" name="TextBox 28"/>
-          <p:cNvSpPr txBox="1"/>
-          <p:nvPr/>
-        </p:nvSpPr>
-        <p:spPr>
-          <a:xfrm>
-            <a:off x="822960" y="4498848"/>
-            <a:ext cx="3566160" cy="237744"/>
-          </a:xfrm>
-          <a:prstGeom prst="rect">
-            <a:avLst/>
-          </a:prstGeom>
-          <a:noFill/>
-        </p:spPr>
-        <p:txBody>
-          <a:bodyPr wrap="square" lIns="0" tIns="0" rIns="0" bIns="0" anchor="t">
-            <a:spAutoFit/>
-          </a:bodyPr>
-          <a:lstStyle/>
-          <a:p>
-            <a:pPr algn="l">
-              <a:spcBef>
-                <a:spcPts val="0"/>
-              </a:spcBef>
-              <a:spcAft>
-                <a:spcPts val="0"/>
-              </a:spcAft>
-            </a:pPr>
-            <a:r>
-              <a:rPr sz="1250" b="1" i="0">
-                <a:solidFill>
-                  <a:srgbClr val="15120F"/>
-                </a:solidFill>
-                <a:latin typeface="Calibri"/>
-              </a:rPr>
-              <a:t>INTEGRATION COMPLEXITY</a:t>
-            </a:r>
-          </a:p>
-        </p:txBody>
-      </p:sp>
-      <p:sp>
-        <p:nvSpPr>
-          <p:cNvPr id="30" name="Rounded Rectangle 29"/>
-          <p:cNvSpPr/>
-          <p:nvPr/>
-        </p:nvSpPr>
-        <p:spPr>
-          <a:xfrm>
-            <a:off x="4809744" y="4498848"/>
-            <a:ext cx="932688" cy="237744"/>
-          </a:xfrm>
-          <a:prstGeom prst="roundRect">
-            <a:avLst>
-              <a:gd name="adj" fmla="val 50000"/>
-            </a:avLst>
-          </a:prstGeom>
-          <a:solidFill>
-            <a:srgbClr val="FFFFFF"/>
-          </a:solidFill>
-          <a:ln w="12700">
-            <a:solidFill>
-              <a:srgbClr val="1C1815"/>
-            </a:solidFill>
-          </a:ln>
-          <a:effectLst/>
-        </p:spPr>
-        <p:style>
-          <a:lnRef idx="1">
-            <a:schemeClr val="accent1"/>
-          </a:lnRef>
-          <a:fillRef idx="3">
-            <a:schemeClr val="accent1"/>
-          </a:fillRef>
-          <a:effectRef idx="2">
-            <a:schemeClr val="accent1"/>
-          </a:effectRef>
-          <a:fontRef idx="minor">
-            <a:schemeClr val="lt1"/>
-          </a:fontRef>
-        </p:style>
-        <p:txBody>
-          <a:bodyPr rtlCol="0" anchor="ctr"/>
-          <a:lstStyle/>
-          <a:p>
-            <a:endParaRPr/>
-          </a:p>
-        </p:txBody>
-      </p:sp>
-      <p:sp>
-        <p:nvSpPr>
-          <p:cNvPr id="31" name="TextBox 30"/>
-          <p:cNvSpPr txBox="1"/>
-          <p:nvPr/>
-        </p:nvSpPr>
-        <p:spPr>
-          <a:xfrm>
-            <a:off x="4809744" y="4498848"/>
-            <a:ext cx="932688" cy="237744"/>
-          </a:xfrm>
-          <a:prstGeom prst="rect">
-            <a:avLst/>
-          </a:prstGeom>
-          <a:noFill/>
-        </p:spPr>
-        <p:txBody>
-          <a:bodyPr wrap="square" lIns="0" tIns="0" rIns="0" bIns="0" anchor="ctr">
-            <a:spAutoFit/>
-          </a:bodyPr>
-          <a:lstStyle/>
-          <a:p>
-            <a:pPr algn="ctr">
-              <a:spcBef>
-                <a:spcPts val="0"/>
-              </a:spcBef>
-              <a:spcAft>
-                <a:spcPts val="0"/>
-              </a:spcAft>
-            </a:pPr>
-            <a:r>
-              <a:rPr sz="850" b="1" i="0">
-                <a:solidFill>
-                  <a:srgbClr val="1C1815"/>
-                </a:solidFill>
-                <a:latin typeface="Calibri"/>
-              </a:rPr>
-              <a:t>MEDIUM</a:t>
-            </a:r>
-          </a:p>
-        </p:txBody>
-      </p:sp>
-      <p:sp>
-        <p:nvSpPr>
-          <p:cNvPr id="32" name="TextBox 31"/>
-          <p:cNvSpPr txBox="1"/>
-          <p:nvPr/>
-        </p:nvSpPr>
-        <p:spPr>
-          <a:xfrm>
-            <a:off x="822960" y="4828032"/>
-            <a:ext cx="4919472" cy="384048"/>
-          </a:xfrm>
-          <a:prstGeom prst="rect">
-            <a:avLst/>
-          </a:prstGeom>
-          <a:noFill/>
-        </p:spPr>
-        <p:txBody>
-          <a:bodyPr wrap="square" lIns="0" tIns="0" rIns="0" bIns="0" anchor="t">
-            <a:spAutoFit/>
-          </a:bodyPr>
-          <a:lstStyle/>
-          <a:p>
-            <a:pPr algn="l">
-              <a:lnSpc>
-                <a:spcPct val="116000"/>
-              </a:lnSpc>
-              <a:spcBef>
-                <a:spcPts val="0"/>
-              </a:spcBef>
-              <a:spcAft>
-                <a:spcPts val="0"/>
-              </a:spcAft>
-            </a:pPr>
-            <a:r>
-              <a:rPr sz="950" b="0" i="0">
-                <a:solidFill>
-                  <a:srgbClr val="8B837C"/>
-                </a:solidFill>
-                <a:latin typeface="Calibri"/>
-              </a:rPr>
-              <a:t>MES, tool controllers, ticketing and notification each carry their own protocol, latency and failure mode.</a:t>
-            </a:r>
-          </a:p>
-        </p:txBody>
-      </p:sp>
-      <p:sp>
-        <p:nvSpPr>
-          <p:cNvPr id="33" name="Rectangle 32"/>
-          <p:cNvSpPr/>
-          <p:nvPr/>
-        </p:nvSpPr>
-        <p:spPr>
-          <a:xfrm>
-            <a:off x="822960" y="5266944"/>
-            <a:ext cx="4919472" cy="10972"/>
-          </a:xfrm>
-          <a:prstGeom prst="rect">
-            <a:avLst/>
-          </a:prstGeom>
-          <a:solidFill>
-            <a:srgbClr val="E7E1DC"/>
-          </a:solidFill>
-          <a:ln>
-            <a:noFill/>
-          </a:ln>
-          <a:effectLst/>
-        </p:spPr>
-        <p:style>
-          <a:lnRef idx="1">
-            <a:schemeClr val="accent1"/>
-          </a:lnRef>
-          <a:fillRef idx="3">
-            <a:schemeClr val="accent1"/>
-          </a:fillRef>
-          <a:effectRef idx="2">
-            <a:schemeClr val="accent1"/>
-          </a:effectRef>
-          <a:fontRef idx="minor">
-            <a:schemeClr val="lt1"/>
-          </a:fontRef>
-        </p:style>
-        <p:txBody>
-          <a:bodyPr rtlCol="0" anchor="ctr"/>
-          <a:lstStyle/>
-          <a:p>
-            <a:endParaRPr/>
-          </a:p>
-        </p:txBody>
-      </p:sp>
-      <p:sp>
-        <p:nvSpPr>
-          <p:cNvPr id="34" name="TextBox 33"/>
-          <p:cNvSpPr txBox="1"/>
-          <p:nvPr/>
-        </p:nvSpPr>
-        <p:spPr>
-          <a:xfrm>
-            <a:off x="822960" y="5376672"/>
-            <a:ext cx="1280160" cy="182880"/>
-          </a:xfrm>
-          <a:prstGeom prst="rect">
-            <a:avLst/>
-          </a:prstGeom>
-          <a:noFill/>
-        </p:spPr>
-        <p:txBody>
-          <a:bodyPr wrap="square" lIns="0" tIns="0" rIns="0" bIns="0" anchor="t">
-            <a:spAutoFit/>
-          </a:bodyPr>
-          <a:lstStyle/>
-          <a:p>
-            <a:pPr algn="l">
-              <a:spcBef>
-                <a:spcPts val="0"/>
-              </a:spcBef>
-              <a:spcAft>
-                <a:spcPts val="0"/>
-              </a:spcAft>
-            </a:pPr>
-            <a:r>
-              <a:rPr sz="900" b="1" i="0">
-                <a:solidFill>
-                  <a:srgbClr val="1C1815"/>
-                </a:solidFill>
-                <a:latin typeface="Calibri"/>
-              </a:rPr>
-              <a:t>MITIGATION</a:t>
-            </a:r>
-          </a:p>
-        </p:txBody>
-      </p:sp>
-      <p:sp>
-        <p:nvSpPr>
-          <p:cNvPr id="35" name="TextBox 34"/>
-          <p:cNvSpPr txBox="1"/>
-          <p:nvPr/>
-        </p:nvSpPr>
-        <p:spPr>
-          <a:xfrm>
-            <a:off x="822960" y="5577840"/>
-            <a:ext cx="4919472" cy="493776"/>
-          </a:xfrm>
-          <a:prstGeom prst="rect">
-            <a:avLst/>
-          </a:prstGeom>
-          <a:noFill/>
-        </p:spPr>
-        <p:txBody>
-          <a:bodyPr wrap="square" lIns="0" tIns="0" rIns="0" bIns="0" anchor="t">
-            <a:spAutoFit/>
-          </a:bodyPr>
-          <a:lstStyle/>
-          <a:p>
-            <a:pPr algn="l">
-              <a:lnSpc>
-                <a:spcPct val="116000"/>
-              </a:lnSpc>
-              <a:spcBef>
-                <a:spcPts val="0"/>
-              </a:spcBef>
-              <a:spcAft>
-                <a:spcPts val="0"/>
-              </a:spcAft>
-            </a:pPr>
-            <a:r>
-              <a:rPr sz="950" b="0" i="0">
-                <a:solidFill>
-                  <a:srgbClr val="3B3530"/>
-                </a:solidFill>
-                <a:latin typeface="Calibri"/>
-              </a:rPr>
-              <a:t>Every external system sits behind an interface with a real and a fake implementation. Circuit breakers, retries with jitter, idempotency keys and bulkheads on every outbound call.</a:t>
-            </a:r>
-          </a:p>
-        </p:txBody>
-      </p:sp>
-      <p:sp>
-        <p:nvSpPr>
-          <p:cNvPr id="36" name="Rounded Rectangle 35"/>
-          <p:cNvSpPr/>
-          <p:nvPr/>
-        </p:nvSpPr>
-        <p:spPr>
-          <a:xfrm>
-            <a:off x="6219748" y="4336084"/>
-            <a:ext cx="5431536" cy="1883664"/>
-          </a:xfrm>
-          <a:prstGeom prst="roundRect">
-            <a:avLst>
-              <a:gd name="adj" fmla="val 8500"/>
-            </a:avLst>
-          </a:prstGeom>
-          <a:solidFill>
-            <a:srgbClr val="E3DEDA"/>
-          </a:solidFill>
-          <a:ln>
-            <a:noFill/>
-          </a:ln>
-          <a:effectLst/>
-        </p:spPr>
-        <p:style>
-          <a:lnRef idx="1">
-            <a:schemeClr val="accent1"/>
-          </a:lnRef>
-          <a:fillRef idx="3">
-            <a:schemeClr val="accent1"/>
-          </a:fillRef>
-          <a:effectRef idx="2">
-            <a:schemeClr val="accent1"/>
-          </a:effectRef>
-          <a:fontRef idx="minor">
-            <a:schemeClr val="lt1"/>
-          </a:fontRef>
-        </p:style>
-        <p:txBody>
-          <a:bodyPr rtlCol="0" anchor="ctr"/>
-          <a:lstStyle/>
-          <a:p>
-            <a:endParaRPr/>
-          </a:p>
-        </p:txBody>
-      </p:sp>
-      <p:sp>
-        <p:nvSpPr>
-          <p:cNvPr id="37" name="Rounded Rectangle 36"/>
-          <p:cNvSpPr/>
-          <p:nvPr/>
-        </p:nvSpPr>
-        <p:spPr>
-          <a:xfrm>
-            <a:off x="6190488" y="4297680"/>
-            <a:ext cx="5431536" cy="1883664"/>
-          </a:xfrm>
-          <a:prstGeom prst="roundRect">
-            <a:avLst>
-              <a:gd name="adj" fmla="val 8500"/>
-            </a:avLst>
-          </a:prstGeom>
-          <a:solidFill>
-            <a:srgbClr val="FFFFFF"/>
-          </a:solidFill>
-          <a:ln w="12700">
-            <a:solidFill>
-              <a:srgbClr val="E7E1DC"/>
-            </a:solidFill>
-          </a:ln>
-          <a:effectLst/>
-        </p:spPr>
-        <p:style>
-          <a:lnRef idx="1">
-            <a:schemeClr val="accent1"/>
-          </a:lnRef>
-          <a:fillRef idx="3">
-            <a:schemeClr val="accent1"/>
-          </a:fillRef>
-          <a:effectRef idx="2">
-            <a:schemeClr val="accent1"/>
-          </a:effectRef>
-          <a:fontRef idx="minor">
-            <a:schemeClr val="lt1"/>
-          </a:fontRef>
-        </p:style>
-        <p:txBody>
-          <a:bodyPr rtlCol="0" anchor="ctr"/>
-          <a:lstStyle/>
-          <a:p>
-            <a:endParaRPr/>
-          </a:p>
-        </p:txBody>
-      </p:sp>
-      <p:sp>
-        <p:nvSpPr>
-          <p:cNvPr id="38" name="TextBox 37"/>
-          <p:cNvSpPr txBox="1"/>
-          <p:nvPr/>
-        </p:nvSpPr>
-        <p:spPr>
-          <a:xfrm>
-            <a:off x="6446520" y="4498848"/>
-            <a:ext cx="3566160" cy="237744"/>
-          </a:xfrm>
-          <a:prstGeom prst="rect">
-            <a:avLst/>
-          </a:prstGeom>
-          <a:noFill/>
-        </p:spPr>
-        <p:txBody>
-          <a:bodyPr wrap="square" lIns="0" tIns="0" rIns="0" bIns="0" anchor="t">
-            <a:spAutoFit/>
-          </a:bodyPr>
-          <a:lstStyle/>
-          <a:p>
-            <a:pPr algn="l">
-              <a:spcBef>
-                <a:spcPts val="0"/>
-              </a:spcBef>
-              <a:spcAft>
-                <a:spcPts val="0"/>
-              </a:spcAft>
-            </a:pPr>
-            <a:r>
-              <a:rPr sz="1250" b="1" i="0">
-                <a:solidFill>
-                  <a:srgbClr val="15120F"/>
-                </a:solidFill>
-                <a:latin typeface="Calibri"/>
-              </a:rPr>
-              <a:t>GOVERNANCE &amp; COMPLIANCE</a:t>
-            </a:r>
-          </a:p>
-        </p:txBody>
-      </p:sp>
-      <p:sp>
-        <p:nvSpPr>
-          <p:cNvPr id="39" name="Rounded Rectangle 38"/>
-          <p:cNvSpPr/>
-          <p:nvPr/>
-        </p:nvSpPr>
-        <p:spPr>
-          <a:xfrm>
-            <a:off x="10433304" y="4498848"/>
-            <a:ext cx="932688" cy="237744"/>
-          </a:xfrm>
-          <a:prstGeom prst="roundRect">
-            <a:avLst>
-              <a:gd name="adj" fmla="val 50000"/>
-            </a:avLst>
-          </a:prstGeom>
-          <a:solidFill>
-            <a:srgbClr val="FFFFFF"/>
-          </a:solidFill>
-          <a:ln w="12700">
-            <a:solidFill>
-              <a:srgbClr val="1C1815"/>
-            </a:solidFill>
-          </a:ln>
-          <a:effectLst/>
-        </p:spPr>
-        <p:style>
-          <a:lnRef idx="1">
-            <a:schemeClr val="accent1"/>
-          </a:lnRef>
-          <a:fillRef idx="3">
-            <a:schemeClr val="accent1"/>
-          </a:fillRef>
-          <a:effectRef idx="2">
-            <a:schemeClr val="accent1"/>
-          </a:effectRef>
-          <a:fontRef idx="minor">
-            <a:schemeClr val="lt1"/>
-          </a:fontRef>
-        </p:style>
-        <p:txBody>
-          <a:bodyPr rtlCol="0" anchor="ctr"/>
-          <a:lstStyle/>
-          <a:p>
-            <a:endParaRPr/>
-          </a:p>
-        </p:txBody>
-      </p:sp>
-      <p:sp>
-        <p:nvSpPr>
-          <p:cNvPr id="40" name="TextBox 39"/>
-          <p:cNvSpPr txBox="1"/>
-          <p:nvPr/>
-        </p:nvSpPr>
-        <p:spPr>
-          <a:xfrm>
-            <a:off x="10433304" y="4498848"/>
-            <a:ext cx="932688" cy="237744"/>
-          </a:xfrm>
-          <a:prstGeom prst="rect">
-            <a:avLst/>
-          </a:prstGeom>
-          <a:noFill/>
-        </p:spPr>
-        <p:txBody>
-          <a:bodyPr wrap="square" lIns="0" tIns="0" rIns="0" bIns="0" anchor="ctr">
-            <a:spAutoFit/>
-          </a:bodyPr>
-          <a:lstStyle/>
-          <a:p>
-            <a:pPr algn="ctr">
-              <a:spcBef>
-                <a:spcPts val="0"/>
-              </a:spcBef>
-              <a:spcAft>
-                <a:spcPts val="0"/>
-              </a:spcAft>
-            </a:pPr>
-            <a:r>
-              <a:rPr sz="850" b="1" i="0">
-                <a:solidFill>
-                  <a:srgbClr val="1C1815"/>
-                </a:solidFill>
-                <a:latin typeface="Calibri"/>
-              </a:rPr>
-              <a:t>MEDIUM</a:t>
-            </a:r>
-          </a:p>
-        </p:txBody>
-      </p:sp>
-      <p:sp>
-        <p:nvSpPr>
-          <p:cNvPr id="41" name="TextBox 40"/>
-          <p:cNvSpPr txBox="1"/>
-          <p:nvPr/>
-        </p:nvSpPr>
-        <p:spPr>
-          <a:xfrm>
-            <a:off x="6446520" y="4828032"/>
-            <a:ext cx="4919472" cy="384048"/>
-          </a:xfrm>
-          <a:prstGeom prst="rect">
-            <a:avLst/>
-          </a:prstGeom>
-          <a:noFill/>
-        </p:spPr>
-        <p:txBody>
-          <a:bodyPr wrap="square" lIns="0" tIns="0" rIns="0" bIns="0" anchor="t">
-            <a:spAutoFit/>
-          </a:bodyPr>
-          <a:lstStyle/>
-          <a:p>
-            <a:pPr algn="l">
-              <a:lnSpc>
-                <a:spcPct val="116000"/>
-              </a:lnSpc>
-              <a:spcBef>
-                <a:spcPts val="0"/>
-              </a:spcBef>
-              <a:spcAft>
-                <a:spcPts val="0"/>
-              </a:spcAft>
-            </a:pPr>
-            <a:r>
-              <a:rPr sz="950" b="0" i="0">
-                <a:solidFill>
-                  <a:srgbClr val="8B837C"/>
-                </a:solidFill>
-                <a:latin typeface="Calibri"/>
-              </a:rPr>
-              <a:t>AI-influenced quality decisions must be explainable, attributable and reversible under audit.</a:t>
-            </a:r>
-          </a:p>
-        </p:txBody>
-      </p:sp>
-      <p:sp>
-        <p:nvSpPr>
-          <p:cNvPr id="42" name="Rectangle 41"/>
-          <p:cNvSpPr/>
-          <p:nvPr/>
-        </p:nvSpPr>
-        <p:spPr>
-          <a:xfrm>
-            <a:off x="6446520" y="5266944"/>
-            <a:ext cx="4919472" cy="10972"/>
-          </a:xfrm>
-          <a:prstGeom prst="rect">
-            <a:avLst/>
-          </a:prstGeom>
-          <a:solidFill>
-            <a:srgbClr val="E7E1DC"/>
-          </a:solidFill>
-          <a:ln>
-            <a:noFill/>
-          </a:ln>
-          <a:effectLst/>
-        </p:spPr>
-        <p:style>
-          <a:lnRef idx="1">
-            <a:schemeClr val="accent1"/>
-          </a:lnRef>
-          <a:fillRef idx="3">
-            <a:schemeClr val="accent1"/>
-          </a:fillRef>
-          <a:effectRef idx="2">
-            <a:schemeClr val="accent1"/>
-          </a:effectRef>
-          <a:fontRef idx="minor">
-            <a:schemeClr val="lt1"/>
-          </a:fontRef>
-        </p:style>
-        <p:txBody>
-          <a:bodyPr rtlCol="0" anchor="ctr"/>
-          <a:lstStyle/>
-          <a:p>
-            <a:endParaRPr/>
-          </a:p>
-        </p:txBody>
-      </p:sp>
-      <p:sp>
-        <p:nvSpPr>
-          <p:cNvPr id="43" name="TextBox 42"/>
-          <p:cNvSpPr txBox="1"/>
-          <p:nvPr/>
-        </p:nvSpPr>
-        <p:spPr>
-          <a:xfrm>
-            <a:off x="6446520" y="5376672"/>
-            <a:ext cx="1280160" cy="182880"/>
-          </a:xfrm>
-          <a:prstGeom prst="rect">
-            <a:avLst/>
-          </a:prstGeom>
-          <a:noFill/>
-        </p:spPr>
-        <p:txBody>
-          <a:bodyPr wrap="square" lIns="0" tIns="0" rIns="0" bIns="0" anchor="t">
-            <a:spAutoFit/>
-          </a:bodyPr>
-          <a:lstStyle/>
-          <a:p>
-            <a:pPr algn="l">
-              <a:spcBef>
-                <a:spcPts val="0"/>
-              </a:spcBef>
-              <a:spcAft>
-                <a:spcPts val="0"/>
-              </a:spcAft>
-            </a:pPr>
-            <a:r>
-              <a:rPr sz="900" b="1" i="0">
-                <a:solidFill>
-                  <a:srgbClr val="1C1815"/>
-                </a:solidFill>
-                <a:latin typeface="Calibri"/>
-              </a:rPr>
-              <a:t>MITIGATION</a:t>
-            </a:r>
-          </a:p>
-        </p:txBody>
-      </p:sp>
-      <p:sp>
-        <p:nvSpPr>
-          <p:cNvPr id="44" name="TextBox 43"/>
-          <p:cNvSpPr txBox="1"/>
-          <p:nvPr/>
-        </p:nvSpPr>
-        <p:spPr>
-          <a:xfrm>
-            <a:off x="6446520" y="5577840"/>
-            <a:ext cx="4919472" cy="493776"/>
-          </a:xfrm>
-          <a:prstGeom prst="rect">
-            <a:avLst/>
-          </a:prstGeom>
-          <a:noFill/>
-        </p:spPr>
-        <p:txBody>
-          <a:bodyPr wrap="square" lIns="0" tIns="0" rIns="0" bIns="0" anchor="t">
-            <a:spAutoFit/>
-          </a:bodyPr>
-          <a:lstStyle/>
-          <a:p>
-            <a:pPr algn="l">
-              <a:lnSpc>
-                <a:spcPct val="116000"/>
-              </a:lnSpc>
-              <a:spcBef>
-                <a:spcPts val="0"/>
-              </a:spcBef>
-              <a:spcAft>
-                <a:spcPts val="0"/>
-              </a:spcAft>
-            </a:pPr>
-            <a:r>
-              <a:rPr sz="950" b="0" i="0">
-                <a:solidFill>
-                  <a:srgbClr val="3B3530"/>
-                </a:solidFill>
-                <a:latin typeface="Calibri"/>
-              </a:rPr>
-              <a:t>Provenance on every AI output. Full audit log with correlation IDs. Operator IDs tokenised. Autonomy ceiling in config and code: reject autonomously, never pass or halt without a human.</a:t>
-            </a:r>
-          </a:p>
-        </p:txBody>
-      </p:sp>
-      <p:sp>
-        <p:nvSpPr>
-          <p:cNvPr id="45" name="Rectangle 44"/>
-          <p:cNvSpPr/>
-          <p:nvPr/>
-        </p:nvSpPr>
-        <p:spPr>
-          <a:xfrm>
-            <a:off x="566928" y="6272784"/>
-            <a:ext cx="11055096" cy="10972"/>
-          </a:xfrm>
-          <a:prstGeom prst="rect">
-            <a:avLst/>
-          </a:prstGeom>
-          <a:solidFill>
-            <a:srgbClr val="E7E1DC"/>
-          </a:solidFill>
-          <a:ln>
-            <a:noFill/>
-          </a:ln>
-          <a:effectLst/>
-        </p:spPr>
-        <p:style>
-          <a:lnRef idx="1">
-            <a:schemeClr val="accent1"/>
-          </a:lnRef>
-          <a:fillRef idx="3">
-            <a:schemeClr val="accent1"/>
-          </a:fillRef>
-          <a:effectRef idx="2">
-            <a:schemeClr val="accent1"/>
-          </a:effectRef>
-          <a:fontRef idx="minor">
-            <a:schemeClr val="lt1"/>
-          </a:fontRef>
-        </p:style>
-        <p:txBody>
-          <a:bodyPr rtlCol="0" anchor="ctr"/>
-          <a:lstStyle/>
-          <a:p>
-            <a:endParaRPr/>
-          </a:p>
-        </p:txBody>
-      </p:sp>
-      <p:sp>
-        <p:nvSpPr>
-          <p:cNvPr id="46" name="TextBox 45"/>
-          <p:cNvSpPr txBox="1"/>
-          <p:nvPr/>
-        </p:nvSpPr>
-        <p:spPr>
-          <a:xfrm>
-            <a:off x="566928" y="6391656"/>
-            <a:ext cx="8229600" cy="310896"/>
-          </a:xfrm>
-          <a:prstGeom prst="rect">
-            <a:avLst/>
-          </a:prstGeom>
-          <a:noFill/>
-        </p:spPr>
-        <p:txBody>
-          <a:bodyPr wrap="square" lIns="0" tIns="0" rIns="0" bIns="0" anchor="t">
-            <a:spAutoFit/>
-          </a:bodyPr>
-          <a:lstStyle/>
-          <a:p>
-            <a:pPr algn="l">
-              <a:spcBef>
-                <a:spcPts val="0"/>
-              </a:spcBef>
-              <a:spcAft>
-                <a:spcPts val="0"/>
-              </a:spcAft>
-            </a:pPr>
-            <a:r>
-              <a:rPr sz="950" b="0" i="0">
-                <a:solidFill>
-                  <a:srgbClr val="948C85"/>
-                </a:solidFill>
-                <a:latin typeface="Calibri"/>
-              </a:rPr>
-              <a:t>Defect Sense  ·  Intelligent Manufacturing Quality Control</a:t>
-            </a:r>
-          </a:p>
-        </p:txBody>
-      </p:sp>
-      <p:sp>
-        <p:nvSpPr>
-          <p:cNvPr id="47" name="TextBox 46"/>
-          <p:cNvSpPr txBox="1"/>
-          <p:nvPr/>
-        </p:nvSpPr>
-        <p:spPr>
-          <a:xfrm>
-            <a:off x="10058400" y="6391656"/>
-            <a:ext cx="1563624" cy="310896"/>
-          </a:xfrm>
-          <a:prstGeom prst="rect">
-            <a:avLst/>
-          </a:prstGeom>
-          <a:noFill/>
-        </p:spPr>
-        <p:txBody>
-          <a:bodyPr wrap="square" lIns="0" tIns="0" rIns="0" bIns="0" anchor="t">
-            <a:spAutoFit/>
-          </a:bodyPr>
-          <a:lstStyle/>
-          <a:p>
-            <a:pPr algn="r">
-              <a:spcBef>
-                <a:spcPts val="0"/>
-              </a:spcBef>
-              <a:spcAft>
-                <a:spcPts val="0"/>
-              </a:spcAft>
-            </a:pPr>
-            <a:r>
-              <a:rPr sz="950" b="1" i="0">
-                <a:solidFill>
-                  <a:srgbClr val="948C85"/>
-                </a:solidFill>
-                <a:latin typeface="Calibri"/>
-              </a:rPr>
-              <a:t>13 / 14</a:t>
-            </a:r>
-          </a:p>
-        </p:txBody>
-      </p:sp>
-    </p:spTree>
-  </p:cSld>
-  <p:clrMapOvr>
-    <a:masterClrMapping/>
-  </p:clrMapOvr>
-</p:sld>
-</file>
-
-<file path=ppt/slides/slide14.xml><?xml version="1.0" encoding="utf-8"?>
-<p:sld xmlns:a="http://schemas.openxmlformats.org/drawingml/2006/main" xmlns:r="http://schemas.openxmlformats.org/officeDocument/2006/relationships" xmlns:p="http://schemas.openxmlformats.org/presentationml/2006/main">
-  <p:cSld>
-    <p:spTree>
-      <p:nvGrpSpPr>
-        <p:cNvPr id="1" name=""/>
-        <p:cNvGrpSpPr/>
-        <p:nvPr/>
-      </p:nvGrpSpPr>
-      <p:grpSpPr>
-        <a:xfrm>
-          <a:off x="0" y="0"/>
-          <a:ext cx="0" cy="0"/>
-          <a:chOff x="0" y="0"/>
-          <a:chExt cx="0" cy="0"/>
-        </a:xfrm>
-      </p:grpSpPr>
-      <p:sp>
-        <p:nvSpPr>
-          <p:cNvPr id="2" name="Rectangle 1"/>
-          <p:cNvSpPr/>
-          <p:nvPr/>
-        </p:nvSpPr>
-        <p:spPr>
-          <a:xfrm>
-            <a:off x="0" y="0"/>
-            <a:ext cx="12191695" cy="6858000"/>
-          </a:xfrm>
-          <a:prstGeom prst="rect">
-            <a:avLst/>
-          </a:prstGeom>
-          <a:solidFill>
-            <a:srgbClr val="EAE8E6"/>
-          </a:solidFill>
-          <a:ln>
-            <a:noFill/>
-          </a:ln>
-          <a:effectLst/>
-        </p:spPr>
-        <p:style>
-          <a:lnRef idx="1">
-            <a:schemeClr val="accent1"/>
-          </a:lnRef>
-          <a:fillRef idx="3">
-            <a:schemeClr val="accent1"/>
-          </a:fillRef>
-          <a:effectRef idx="2">
-            <a:schemeClr val="accent1"/>
-          </a:effectRef>
-          <a:fontRef idx="minor">
-            <a:schemeClr val="lt1"/>
-          </a:fontRef>
-        </p:style>
-        <p:txBody>
-          <a:bodyPr rtlCol="0" anchor="ctr"/>
-          <a:lstStyle/>
-          <a:p>
-            <a:endParaRPr/>
-          </a:p>
-        </p:txBody>
-      </p:sp>
-      <p:sp>
-        <p:nvSpPr>
-          <p:cNvPr id="3" name="Rounded Rectangle 2"/>
-          <p:cNvSpPr/>
-          <p:nvPr/>
-        </p:nvSpPr>
-        <p:spPr>
-          <a:xfrm>
-            <a:off x="274320" y="256032"/>
-            <a:ext cx="11643055" cy="6345936"/>
-          </a:xfrm>
-          <a:prstGeom prst="roundRect">
-            <a:avLst>
-              <a:gd name="adj" fmla="val 3500"/>
-            </a:avLst>
-          </a:prstGeom>
-          <a:solidFill>
-            <a:srgbClr val="FBFAF9"/>
-          </a:solidFill>
-          <a:ln w="12700">
-            <a:solidFill>
-              <a:srgbClr val="F1ECE8"/>
-            </a:solidFill>
-          </a:ln>
-          <a:effectLst/>
-        </p:spPr>
-        <p:style>
-          <a:lnRef idx="1">
-            <a:schemeClr val="accent1"/>
-          </a:lnRef>
-          <a:fillRef idx="3">
-            <a:schemeClr val="accent1"/>
-          </a:fillRef>
-          <a:effectRef idx="2">
-            <a:schemeClr val="accent1"/>
-          </a:effectRef>
-          <a:fontRef idx="minor">
-            <a:schemeClr val="lt1"/>
-          </a:fontRef>
-        </p:style>
-        <p:txBody>
-          <a:bodyPr rtlCol="0" anchor="ctr"/>
-          <a:lstStyle/>
-          <a:p>
-            <a:endParaRPr/>
-          </a:p>
-        </p:txBody>
-      </p:sp>
-      <p:sp>
-        <p:nvSpPr>
-          <p:cNvPr id="4" name="Oval 3"/>
-          <p:cNvSpPr/>
-          <p:nvPr/>
-        </p:nvSpPr>
-        <p:spPr>
-          <a:xfrm>
-            <a:off x="566928" y="443484"/>
-            <a:ext cx="82296" cy="82296"/>
-          </a:xfrm>
-          <a:prstGeom prst="ellipse">
-            <a:avLst/>
-          </a:prstGeom>
-          <a:solidFill>
-            <a:srgbClr val="E1552B"/>
-          </a:solidFill>
-          <a:ln>
-            <a:noFill/>
-          </a:ln>
-          <a:effectLst/>
-        </p:spPr>
-        <p:style>
-          <a:lnRef idx="1">
-            <a:schemeClr val="accent1"/>
-          </a:lnRef>
-          <a:fillRef idx="3">
-            <a:schemeClr val="accent1"/>
-          </a:fillRef>
-          <a:effectRef idx="2">
-            <a:schemeClr val="accent1"/>
-          </a:effectRef>
-          <a:fontRef idx="minor">
-            <a:schemeClr val="lt1"/>
-          </a:fontRef>
-        </p:style>
-        <p:txBody>
-          <a:bodyPr rtlCol="0" anchor="ctr"/>
-          <a:lstStyle/>
-          <a:p>
-            <a:endParaRPr/>
-          </a:p>
-        </p:txBody>
-      </p:sp>
-      <p:sp>
-        <p:nvSpPr>
-          <p:cNvPr id="5" name="TextBox 4"/>
-          <p:cNvSpPr txBox="1"/>
-          <p:nvPr/>
-        </p:nvSpPr>
-        <p:spPr>
-          <a:xfrm>
-            <a:off x="758952" y="384048"/>
-            <a:ext cx="11055096" cy="310896"/>
-          </a:xfrm>
-          <a:prstGeom prst="rect">
-            <a:avLst/>
-          </a:prstGeom>
-          <a:noFill/>
-        </p:spPr>
-        <p:txBody>
-          <a:bodyPr wrap="square" lIns="0" tIns="0" rIns="0" bIns="0" anchor="t">
-            <a:spAutoFit/>
-          </a:bodyPr>
-          <a:lstStyle/>
-          <a:p>
-            <a:pPr algn="l">
-              <a:spcBef>
-                <a:spcPts val="0"/>
-              </a:spcBef>
-              <a:spcAft>
-                <a:spcPts val="0"/>
-              </a:spcAft>
-            </a:pPr>
-            <a:r>
-              <a:rPr sz="1150" b="1" i="0">
-                <a:solidFill>
-                  <a:srgbClr val="E1552B"/>
-                </a:solidFill>
-                <a:latin typeface="Calibri"/>
-              </a:rPr>
               <a:t>CONCLUSION</a:t>
             </a:r>
           </a:p>
@@ -16162,7 +13908,7 @@
         <p:spPr>
           <a:xfrm>
             <a:off x="1298448" y="2340864"/>
-            <a:ext cx="4315968" cy="219456"/>
+            <a:ext cx="4315968" cy="176972"/>
           </a:xfrm>
           <a:prstGeom prst="rect">
             <a:avLst/>
@@ -16184,14 +13930,38 @@
               </a:spcAft>
             </a:pPr>
             <a:r>
-              <a:rPr sz="1150" b="1" i="0">
+              <a:rPr lang="en-US" sz="1150" b="1" dirty="0">
                 <a:solidFill>
                   <a:srgbClr val="15120F"/>
                 </a:solidFill>
                 <a:latin typeface="Calibri"/>
               </a:rPr>
-              <a:t>Detection alone is not the product</a:t>
-            </a:r>
+              <a:t>Generalize for All Componen</a:t>
+            </a:r>
+            <a:r>
+              <a:rPr sz="1150" b="1" i="0" dirty="0">
+                <a:solidFill>
+                  <a:srgbClr val="15120F"/>
+                </a:solidFill>
+                <a:latin typeface="Calibri"/>
+              </a:rPr>
+              <a:t>t</a:t>
+            </a:r>
+            <a:r>
+              <a:rPr lang="en-US" sz="1150" b="1" i="0" dirty="0">
+                <a:solidFill>
+                  <a:srgbClr val="15120F"/>
+                </a:solidFill>
+                <a:latin typeface="Calibri"/>
+              </a:rPr>
+              <a:t> based on input at runtime</a:t>
+            </a:r>
+            <a:endParaRPr sz="1150" b="1" i="0" dirty="0">
+              <a:solidFill>
+                <a:srgbClr val="15120F"/>
+              </a:solidFill>
+              <a:latin typeface="Calibri"/>
+            </a:endParaRPr>
           </a:p>
         </p:txBody>
       </p:sp>
@@ -16204,7 +13974,7 @@
         <p:spPr>
           <a:xfrm>
             <a:off x="1298448" y="2578608"/>
-            <a:ext cx="4315968" cy="365760"/>
+            <a:ext cx="4315968" cy="159339"/>
           </a:xfrm>
           <a:prstGeom prst="rect">
             <a:avLst/>
@@ -16229,14 +13999,20 @@
               </a:spcAft>
             </a:pPr>
             <a:r>
-              <a:rPr sz="950" b="0" i="0">
+              <a:rPr lang="en-US" sz="950" b="0" i="0" dirty="0">
                 <a:solidFill>
                   <a:srgbClr val="8B837C"/>
                 </a:solidFill>
                 <a:latin typeface="Calibri"/>
               </a:rPr>
-              <a:t>It explains the cause, prices the action, learns from the outcome.</a:t>
-            </a:r>
+              <a:t>Orchestrator agent will swindle defect detection agent that will check component.</a:t>
+            </a:r>
+            <a:endParaRPr sz="950" b="0" i="0" dirty="0">
+              <a:solidFill>
+                <a:srgbClr val="8B837C"/>
+              </a:solidFill>
+              <a:latin typeface="Calibri"/>
+            </a:endParaRPr>
           </a:p>
         </p:txBody>
       </p:sp>
@@ -18945,7 +16721,7 @@
         <p:spPr>
           <a:xfrm>
             <a:off x="7232904" y="3639312"/>
-            <a:ext cx="4114800" cy="256032"/>
+            <a:ext cx="4114800" cy="207749"/>
           </a:xfrm>
           <a:prstGeom prst="rect">
             <a:avLst/>
@@ -18967,13 +16743,31 @@
               </a:spcAft>
             </a:pPr>
             <a:r>
-              <a:rPr sz="1350" b="1" i="0">
+              <a:rPr sz="1350" b="1" i="0" dirty="0">
                 <a:solidFill>
                   <a:srgbClr val="15120F"/>
                 </a:solidFill>
                 <a:latin typeface="Calibri"/>
               </a:rPr>
-              <a:t>YASHWANT PATIDAR</a:t>
+              <a:t>YASH</a:t>
+            </a:r>
+            <a:r>
+              <a:rPr lang="en-US" sz="1350" b="1" i="0" dirty="0">
+                <a:solidFill>
+                  <a:srgbClr val="15120F"/>
+                </a:solidFill>
+                <a:latin typeface="Calibri"/>
+              </a:rPr>
+              <a:t>V</a:t>
+            </a:r>
+            <a:r>
+              <a:rPr sz="1350" b="1" i="0" dirty="0">
+                <a:solidFill>
+                  <a:srgbClr val="15120F"/>
+                </a:solidFill>
+                <a:latin typeface="Calibri"/>
+              </a:rPr>
+              <a:t>ANT PATIDAR</a:t>
             </a:r>
           </a:p>
         </p:txBody>
@@ -19516,7 +17310,7 @@
                   <a:srgbClr val="8B837C"/>
                 </a:solidFill>
               </a:rPr>
-              <a:t>, QA automation</a:t>
+              <a:t>, QA Automation</a:t>
             </a:r>
             <a:endParaRPr sz="1000" b="0" i="0" dirty="0">
               <a:solidFill>
@@ -19570,16 +17364,34 @@
                 </a:solidFill>
                 <a:latin typeface="Calibri"/>
               </a:rPr>
-              <a:t>Solution architecture · </a:t>
-            </a:r>
-            <a:r>
-              <a:rPr lang="en-US" sz="1000" b="0" i="0" dirty="0">
+              <a:t>Solution </a:t>
+            </a:r>
+            <a:r>
+              <a:rPr lang="en-US" sz="1000" dirty="0">
                 <a:solidFill>
                   <a:srgbClr val="8B837C"/>
                 </a:solidFill>
                 <a:latin typeface="Calibri"/>
               </a:rPr>
-              <a:t>Agentic AI</a:t>
+              <a:t>Architect</a:t>
+            </a:r>
+            <a:r>
+              <a:rPr sz="1000" b="0" i="0" dirty="0">
+                <a:solidFill>
+                  <a:srgbClr val="8B837C"/>
+                </a:solidFill>
+                <a:latin typeface="Calibri"/>
+              </a:rPr>
+              <a:t> · </a:t>
+            </a:r>
+            <a:r>
+              <a:rPr lang="en-US" sz="1000" dirty="0">
+                <a:solidFill>
+                  <a:srgbClr val="8B837C"/>
+                </a:solidFill>
+                <a:latin typeface="Calibri"/>
+              </a:rPr>
+              <a:t>Tech Lead</a:t>
             </a:r>
             <a:endParaRPr sz="1000" b="0" i="0" dirty="0">
               <a:solidFill>
@@ -20828,7 +18640,7 @@
               </a:spcAft>
             </a:pPr>
             <a:r>
-              <a:rPr sz="1250" b="0" i="0">
+              <a:rPr sz="1250" b="0" i="0" dirty="0">
                 <a:solidFill>
                   <a:srgbClr val="3B3530"/>
                 </a:solidFill>
@@ -23822,13 +21634,31 @@
               </a:spcAft>
             </a:pPr>
             <a:r>
-              <a:rPr sz="1300" b="0" i="0">
+              <a:rPr sz="1300" b="0" i="0" dirty="0">
                 <a:solidFill>
                   <a:srgbClr val="3B3530"/>
                 </a:solidFill>
                 <a:latin typeface="Calibri"/>
               </a:rPr>
-              <a:t>An enterprise multi-agent quality platform that fuses inspection images, fastening-tool telemetry and MES production context into one evidence-backed decision — then explains it, prices it, and escalates it to a human when it should.</a:t>
+              <a:t>An enterprise multi-agent </a:t>
+            </a:r>
+            <a:r>
+              <a:rPr lang="en-US" sz="1300" b="0" i="0" dirty="0">
+                <a:solidFill>
+                  <a:srgbClr val="3B3530"/>
+                </a:solidFill>
+                <a:latin typeface="Calibri"/>
+              </a:rPr>
+              <a:t>enterprise grade </a:t>
+            </a:r>
+            <a:r>
+              <a:rPr sz="1300" b="0" i="0" dirty="0">
+                <a:solidFill>
+                  <a:srgbClr val="3B3530"/>
+                </a:solidFill>
+                <a:latin typeface="Calibri"/>
+              </a:rPr>
+              <a:t>platform that fuses inspection images, fastening-tool telemetry and MES production context into one evidence-backed decision — then explains it, prices it, and escalates it to a human when it should.</a:t>
             </a:r>
           </a:p>
         </p:txBody>
@@ -26940,8 +24770,8 @@
         </p:nvSpPr>
         <p:spPr>
           <a:xfrm>
-            <a:off x="3419856" y="2331720"/>
-            <a:ext cx="1664208" cy="237744"/>
+            <a:off x="3419856" y="2387562"/>
+            <a:ext cx="1664208" cy="126060"/>
           </a:xfrm>
           <a:prstGeom prst="rect">
             <a:avLst/>
@@ -26954,22 +24784,14 @@
           </a:bodyPr>
           <a:lstStyle/>
           <a:p>
-            <a:pPr algn="ctr">
-              <a:spcBef>
-                <a:spcPts val="0"/>
-              </a:spcBef>
-              <a:spcAft>
-                <a:spcPts val="0"/>
-              </a:spcAft>
-            </a:pPr>
-            <a:r>
-              <a:rPr sz="819" b="0" i="0">
+            <a:pPr algn="ctr"/>
+            <a:r>
+              <a:rPr lang="en-US" sz="819" dirty="0">
                 <a:solidFill>
                   <a:srgbClr val="3B3530"/>
                 </a:solidFill>
-                <a:latin typeface="Calibri"/>
-              </a:rPr>
-              <a:t>MES / ERP work orders</a:t>
+              </a:rPr>
+              <a:t>Sensor Data</a:t>
             </a:r>
           </a:p>
         </p:txBody>
@@ -27210,8 +25032,8 @@
         </p:nvSpPr>
         <p:spPr>
           <a:xfrm>
-            <a:off x="3419856" y="2596896"/>
-            <a:ext cx="1664208" cy="237744"/>
+            <a:off x="3419856" y="2652738"/>
+            <a:ext cx="1664208" cy="126060"/>
           </a:xfrm>
           <a:prstGeom prst="rect">
             <a:avLst/>
@@ -27233,14 +25055,19 @@
               </a:spcAft>
             </a:pPr>
             <a:r>
-              <a:rPr sz="819" b="0" i="0">
+              <a:rPr lang="en-US" sz="819" dirty="0">
                 <a:solidFill>
                   <a:srgbClr val="3B3530"/>
                 </a:solidFill>
-                <a:latin typeface="Calibri"/>
-              </a:rPr>
-              <a:t>Azure DevOps · Jira QI tickets</a:t>
-            </a:r>
+              </a:rPr>
+              <a:t>MES / ERP work orders</a:t>
+            </a:r>
+            <a:endParaRPr sz="819" b="0" i="0" dirty="0">
+              <a:solidFill>
+                <a:srgbClr val="3B3530"/>
+              </a:solidFill>
+              <a:latin typeface="Calibri"/>
+            </a:endParaRPr>
           </a:p>
         </p:txBody>
       </p:sp>
@@ -27638,7 +25465,7 @@
               </a:spcAft>
             </a:pPr>
             <a:r>
-              <a:rPr sz="819" b="0" i="0">
+              <a:rPr sz="819" b="0" i="0" dirty="0">
                 <a:solidFill>
                   <a:srgbClr val="3B3530"/>
                 </a:solidFill>
@@ -27998,7 +25825,7 @@
               </a:spcAft>
             </a:pPr>
             <a:r>
-              <a:rPr sz="819" b="0" i="0">
+              <a:rPr sz="819" b="0" i="0" dirty="0">
                 <a:solidFill>
                   <a:srgbClr val="3B3530"/>
                 </a:solidFill>
@@ -29325,8 +27152,8 @@
         </p:nvSpPr>
         <p:spPr>
           <a:xfrm>
-            <a:off x="5157216" y="4901184"/>
-            <a:ext cx="1664208" cy="237744"/>
+            <a:off x="5157216" y="4957026"/>
+            <a:ext cx="1664208" cy="126060"/>
           </a:xfrm>
           <a:prstGeom prst="rect">
             <a:avLst/>
@@ -29348,13 +27175,40 @@
               </a:spcAft>
             </a:pPr>
             <a:r>
-              <a:rPr sz="819" b="0" i="0">
+              <a:rPr lang="en-US" sz="819" dirty="0">
                 <a:solidFill>
                   <a:srgbClr val="3B3530"/>
                 </a:solidFill>
                 <a:latin typeface="Calibri"/>
               </a:rPr>
-              <a:t>Slack / email notification</a:t>
+              <a:t>E</a:t>
+            </a:r>
+            <a:r>
+              <a:rPr sz="819" b="0" i="0" dirty="0">
+                <a:solidFill>
+                  <a:srgbClr val="3B3530"/>
+                </a:solidFill>
+                <a:latin typeface="Calibri"/>
+              </a:rPr>
+              <a:t>mail</a:t>
+            </a:r>
+            <a:r>
+              <a:rPr lang="en-US" sz="819" b="0" i="0" dirty="0">
+                <a:solidFill>
+                  <a:srgbClr val="3B3530"/>
+                </a:solidFill>
+                <a:latin typeface="Calibri"/>
+              </a:rPr>
+              <a:t>/Slack</a:t>
+            </a:r>
+            <a:r>
+              <a:rPr sz="819" b="0" i="0" dirty="0">
+                <a:solidFill>
+                  <a:srgbClr val="3B3530"/>
+                </a:solidFill>
+                <a:latin typeface="Calibri"/>
+              </a:rPr>
+              <a:t> notification</a:t>
             </a:r>
           </a:p>
         </p:txBody>
@@ -29640,8 +27494,8 @@
         </p:nvSpPr>
         <p:spPr>
           <a:xfrm>
-            <a:off x="3419856" y="5404104"/>
-            <a:ext cx="1664208" cy="237744"/>
+            <a:off x="3419856" y="5459946"/>
+            <a:ext cx="1664208" cy="126060"/>
           </a:xfrm>
           <a:prstGeom prst="rect">
             <a:avLst/>
@@ -29663,13 +27517,22 @@
               </a:spcAft>
             </a:pPr>
             <a:r>
-              <a:rPr sz="819" b="0" i="0">
+              <a:rPr lang="en-US" sz="819" b="0" i="0" dirty="0">
                 <a:solidFill>
                   <a:srgbClr val="3B3530"/>
                 </a:solidFill>
                 <a:latin typeface="Calibri"/>
               </a:rPr>
-              <a:t>5 roles, test-asserted RBAC</a:t>
+              <a:t>3</a:t>
+            </a:r>
+            <a:r>
+              <a:rPr sz="819" b="0" i="0" dirty="0">
+                <a:solidFill>
+                  <a:srgbClr val="3B3530"/>
+                </a:solidFill>
+                <a:latin typeface="Calibri"/>
+              </a:rPr>
+              <a:t> roles, test-asserted RBAC</a:t>
             </a:r>
           </a:p>
         </p:txBody>
@@ -34543,48 +32406,6 @@
       </p:sp>
       <p:sp>
         <p:nvSpPr>
-          <p:cNvPr id="84" name="TextBox 83"/>
-          <p:cNvSpPr txBox="1"/>
-          <p:nvPr/>
-        </p:nvSpPr>
-        <p:spPr>
-          <a:xfrm>
-            <a:off x="9198864" y="3648456"/>
-            <a:ext cx="2185416" cy="182880"/>
-          </a:xfrm>
-          <a:prstGeom prst="rect">
-            <a:avLst/>
-          </a:prstGeom>
-          <a:noFill/>
-        </p:spPr>
-        <p:txBody>
-          <a:bodyPr wrap="square" lIns="0" tIns="0" rIns="0" bIns="0" anchor="t">
-            <a:spAutoFit/>
-          </a:bodyPr>
-          <a:lstStyle/>
-          <a:p>
-            <a:pPr algn="l">
-              <a:spcBef>
-                <a:spcPts val="0"/>
-              </a:spcBef>
-              <a:spcAft>
-                <a:spcPts val="0"/>
-              </a:spcAft>
-            </a:pPr>
-            <a:r>
-              <a:rPr sz="800" b="1" i="0">
-                <a:solidFill>
-                  <a:srgbClr val="E1552B"/>
-                </a:solidFill>
-                <a:latin typeface="Calibri"/>
-              </a:rPr>
-              <a:t>↺  Reflection 1</a:t>
-            </a:r>
-          </a:p>
-        </p:txBody>
-      </p:sp>
-      <p:sp>
-        <p:nvSpPr>
           <p:cNvPr id="85" name="TextBox 84"/>
           <p:cNvSpPr txBox="1"/>
           <p:nvPr/>
@@ -34981,13 +32802,13 @@
       </p:sp>
       <p:sp>
         <p:nvSpPr>
-          <p:cNvPr id="94" name="TextBox 93"/>
+          <p:cNvPr id="95" name="TextBox 94"/>
           <p:cNvSpPr txBox="1"/>
           <p:nvPr/>
         </p:nvSpPr>
         <p:spPr>
           <a:xfrm>
-            <a:off x="9198864" y="4146804"/>
+            <a:off x="9198864" y="4320540"/>
             <a:ext cx="2185416" cy="182880"/>
           </a:xfrm>
           <a:prstGeom prst="rect">
@@ -35010,55 +32831,22 @@
               </a:spcAft>
             </a:pPr>
             <a:r>
-              <a:rPr sz="800" b="1" i="0">
-                <a:solidFill>
-                  <a:srgbClr val="E1552B"/>
-                </a:solidFill>
-                <a:latin typeface="Calibri"/>
-              </a:rPr>
-              <a:t>↺  Reflection 2</a:t>
-            </a:r>
-          </a:p>
-        </p:txBody>
-      </p:sp>
-      <p:sp>
-        <p:nvSpPr>
-          <p:cNvPr id="95" name="TextBox 94"/>
-          <p:cNvSpPr txBox="1"/>
-          <p:nvPr/>
-        </p:nvSpPr>
-        <p:spPr>
-          <a:xfrm>
-            <a:off x="9198864" y="4320540"/>
-            <a:ext cx="2185416" cy="182880"/>
-          </a:xfrm>
-          <a:prstGeom prst="rect">
-            <a:avLst/>
-          </a:prstGeom>
-          <a:noFill/>
-        </p:spPr>
-        <p:txBody>
-          <a:bodyPr wrap="square" lIns="0" tIns="0" rIns="0" bIns="0" anchor="t">
-            <a:spAutoFit/>
-          </a:bodyPr>
-          <a:lstStyle/>
-          <a:p>
-            <a:pPr algn="l">
-              <a:spcBef>
-                <a:spcPts val="0"/>
-              </a:spcBef>
-              <a:spcAft>
-                <a:spcPts val="0"/>
-              </a:spcAft>
-            </a:pPr>
-            <a:r>
-              <a:rPr sz="780" b="0" i="0">
+              <a:rPr sz="780" b="0" i="0" dirty="0" err="1">
                 <a:solidFill>
                   <a:srgbClr val="8B837C"/>
                 </a:solidFill>
                 <a:latin typeface="Calibri"/>
               </a:rPr>
-              <a:t>Groundedness &lt; 0.7 → re-retrieve</a:t>
+              <a:t>Groundedness</a:t>
+            </a:r>
+            <a:r>
+              <a:rPr sz="780" b="0" i="0" dirty="0">
+                <a:solidFill>
+                  <a:srgbClr val="8B837C"/>
+                </a:solidFill>
+                <a:latin typeface="Calibri"/>
+              </a:rPr>
+              <a:t> &lt; 0.7 → re-retrieve</a:t>
             </a:r>
           </a:p>
         </p:txBody>
@@ -35340,7 +33128,7 @@
         <p:spPr>
           <a:xfrm>
             <a:off x="4974336" y="4846320"/>
-            <a:ext cx="3858768" cy="182880"/>
+            <a:ext cx="3858768" cy="126060"/>
           </a:xfrm>
           <a:prstGeom prst="rect">
             <a:avLst/>
@@ -35362,13 +33150,31 @@
               </a:spcAft>
             </a:pPr>
             <a:r>
-              <a:rPr sz="819" b="0" i="0">
+              <a:rPr sz="819" b="0" i="0" dirty="0">
                 <a:solidFill>
                   <a:srgbClr val="8B837C"/>
                 </a:solidFill>
                 <a:latin typeface="Calibri"/>
               </a:rPr>
-              <a:t>expected-cost minimisation across dispositions, ₹ + $</a:t>
+              <a:t>expected-cost </a:t>
+            </a:r>
+            <a:r>
+              <a:rPr sz="819" b="0" i="0" dirty="0" err="1">
+                <a:solidFill>
+                  <a:srgbClr val="8B837C"/>
+                </a:solidFill>
+                <a:latin typeface="Calibri"/>
+              </a:rPr>
+              <a:t>minimisation</a:t>
+            </a:r>
+            <a:r>
+              <a:rPr sz="819" b="0" i="0" dirty="0">
+                <a:solidFill>
+                  <a:srgbClr val="8B837C"/>
+                </a:solidFill>
+                <a:latin typeface="Calibri"/>
+              </a:rPr>
+              <a:t> across dispositions, ₹</a:t>
             </a:r>
           </a:p>
         </p:txBody>
